--- a/examples/simple_example.pptx
+++ b/examples/simple_example.pptx
@@ -1,16 +1,111 @@
 
 <file path=ppt/presentation.xml><?xml version="1.0" encoding="utf-8"?>
-<p:presentation xmlns:p="http://schemas.openxmlformats.org/presentationml/2006/main" xmlns:r="http://schemas.openxmlformats.org/officeDocument/2006/relationships">
+<p:presentation xmlns:a="http://schemas.openxmlformats.org/drawingml/2006/main" xmlns:p="http://schemas.openxmlformats.org/presentationml/2006/main" xmlns:r="http://schemas.openxmlformats.org/officeDocument/2006/relationships" saveSubsetFonts="1" autoCompressPictures="0">
   <p:sldMasterIdLst>
-    <p:sldMasterId r:id="rId1" id="2147483648"/>
+    <p:sldMasterId id="2147483648" r:id="rId1"/>
   </p:sldMasterIdLst>
   <p:sldIdLst>
     <p:sldId id="257" r:id="rId2"/>
     <p:sldId id="258" r:id="rId3"/>
     <p:sldId id="259" r:id="rId4"/>
   </p:sldIdLst>
-  <p:sldSz cx="9144000" cy="6858000"/>
+  <p:sldSz cx="9144000" cy="6858000" type="screen4x3"/>
   <p:notesSz cx="9144000" cy="6858000"/>
+  <p:defaultTextStyle>
+    <a:defPPr>
+      <a:defRPr lang="en-US"/>
+    </a:defPPr>
+    <a:lvl1pPr marL="0" algn="l" defTabSz="457200" rtl="0" eaLnBrk="1" latinLnBrk="0" hangingPunct="1">
+      <a:defRPr sz="1800" kern="1200">
+        <a:solidFill>
+          <a:schemeClr val="tx1"/>
+        </a:solidFill>
+        <a:latin typeface="+mn-lt"/>
+        <a:ea typeface="+mn-ea"/>
+        <a:cs typeface="+mn-cs"/>
+      </a:defRPr>
+    </a:lvl1pPr>
+    <a:lvl2pPr marL="457200" algn="l" defTabSz="457200" rtl="0" eaLnBrk="1" latinLnBrk="0" hangingPunct="1">
+      <a:defRPr sz="1800" kern="1200">
+        <a:solidFill>
+          <a:schemeClr val="tx1"/>
+        </a:solidFill>
+        <a:latin typeface="+mn-lt"/>
+        <a:ea typeface="+mn-ea"/>
+        <a:cs typeface="+mn-cs"/>
+      </a:defRPr>
+    </a:lvl2pPr>
+    <a:lvl3pPr marL="914400" algn="l" defTabSz="457200" rtl="0" eaLnBrk="1" latinLnBrk="0" hangingPunct="1">
+      <a:defRPr sz="1800" kern="1200">
+        <a:solidFill>
+          <a:schemeClr val="tx1"/>
+        </a:solidFill>
+        <a:latin typeface="+mn-lt"/>
+        <a:ea typeface="+mn-ea"/>
+        <a:cs typeface="+mn-cs"/>
+      </a:defRPr>
+    </a:lvl3pPr>
+    <a:lvl4pPr marL="1371600" algn="l" defTabSz="457200" rtl="0" eaLnBrk="1" latinLnBrk="0" hangingPunct="1">
+      <a:defRPr sz="1800" kern="1200">
+        <a:solidFill>
+          <a:schemeClr val="tx1"/>
+        </a:solidFill>
+        <a:latin typeface="+mn-lt"/>
+        <a:ea typeface="+mn-ea"/>
+        <a:cs typeface="+mn-cs"/>
+      </a:defRPr>
+    </a:lvl4pPr>
+    <a:lvl5pPr marL="1828800" algn="l" defTabSz="457200" rtl="0" eaLnBrk="1" latinLnBrk="0" hangingPunct="1">
+      <a:defRPr sz="1800" kern="1200">
+        <a:solidFill>
+          <a:schemeClr val="tx1"/>
+        </a:solidFill>
+        <a:latin typeface="+mn-lt"/>
+        <a:ea typeface="+mn-ea"/>
+        <a:cs typeface="+mn-cs"/>
+      </a:defRPr>
+    </a:lvl5pPr>
+    <a:lvl6pPr marL="2286000" algn="l" defTabSz="457200" rtl="0" eaLnBrk="1" latinLnBrk="0" hangingPunct="1">
+      <a:defRPr sz="1800" kern="1200">
+        <a:solidFill>
+          <a:schemeClr val="tx1"/>
+        </a:solidFill>
+        <a:latin typeface="+mn-lt"/>
+        <a:ea typeface="+mn-ea"/>
+        <a:cs typeface="+mn-cs"/>
+      </a:defRPr>
+    </a:lvl6pPr>
+    <a:lvl7pPr marL="2743200" algn="l" defTabSz="457200" rtl="0" eaLnBrk="1" latinLnBrk="0" hangingPunct="1">
+      <a:defRPr sz="1800" kern="1200">
+        <a:solidFill>
+          <a:schemeClr val="tx1"/>
+        </a:solidFill>
+        <a:latin typeface="+mn-lt"/>
+        <a:ea typeface="+mn-ea"/>
+        <a:cs typeface="+mn-cs"/>
+      </a:defRPr>
+    </a:lvl7pPr>
+    <a:lvl8pPr marL="3200400" algn="l" defTabSz="457200" rtl="0" eaLnBrk="1" latinLnBrk="0" hangingPunct="1">
+      <a:defRPr sz="1800" kern="1200">
+        <a:solidFill>
+          <a:schemeClr val="tx1"/>
+        </a:solidFill>
+        <a:latin typeface="+mn-lt"/>
+        <a:ea typeface="+mn-ea"/>
+        <a:cs typeface="+mn-cs"/>
+      </a:defRPr>
+    </a:lvl8pPr>
+    <a:lvl9pPr marL="3657600" algn="l" defTabSz="457200" rtl="0" eaLnBrk="1" latinLnBrk="0" hangingPunct="1">
+      <a:defRPr sz="1800" kern="1200">
+        <a:solidFill>
+          <a:schemeClr val="tx1"/>
+        </a:solidFill>
+        <a:latin typeface="+mn-lt"/>
+        <a:ea typeface="+mn-ea"/>
+        <a:cs typeface="+mn-cs"/>
+      </a:defRPr>
+    </a:lvl9pPr>
+  </p:defaultTextStyle>
 </p:presentation>
 </file>
 

--- a/examples/simple_example.pptx
+++ b/examples/simple_example.pptx
@@ -910,7 +910,7 @@
           <a:p>
             <a:r>
               <a:rPr lang="en-US" dirty="0"/>
-              <a:t>Welcome</a:t>
+              <a:t>Key Points</a:t>
             </a:r>
             <a:endParaRPr lang="en-US"/>
           </a:p>
@@ -933,21 +933,21 @@
           <a:p>
             <a:r>
               <a:rPr lang="en-US" dirty="0"/>
-              <a:t>This is a test</a:t>
+              <a:t>Point 1</a:t>
             </a:r>
             <a:endParaRPr lang="en-US"/>
           </a:p>
           <a:p>
             <a:r>
               <a:rPr lang="en-US" dirty="0"/>
-              <a:t>Built from scratch</a:t>
+              <a:t>Point 2</a:t>
             </a:r>
             <a:endParaRPr lang="en-US"/>
           </a:p>
           <a:p>
             <a:r>
               <a:rPr lang="en-US" dirty="0"/>
-              <a:t>No external dependencies</a:t>
+              <a:t>Point 3</a:t>
             </a:r>
             <a:endParaRPr lang="en-US"/>
           </a:p>
@@ -995,7 +995,7 @@
           <a:p>
             <a:r>
               <a:rPr lang="en-US" dirty="0"/>
-              <a:t>Features</a:t>
+              <a:t>Comparison</a:t>
             </a:r>
             <a:endParaRPr lang="en-US"/>
           </a:p>
@@ -1018,58 +1018,44 @@
           <a:p>
             <a:r>
               <a:rPr lang="en-US" dirty="0"/>
-              <a:t>From scratch XML</a:t>
+              <a:t>Left A</a:t>
             </a:r>
             <a:endParaRPr lang="en-US"/>
           </a:p>
           <a:p>
             <a:r>
               <a:rPr lang="en-US" dirty="0"/>
-              <a:t>Complete layouts</a:t>
+              <a:t>Left B</a:t>
             </a:r>
             <a:endParaRPr lang="en-US"/>
           </a:p>
+        </p:txBody>
+      </p:sp>
+      <p:sp>
+        <p:nvSpPr>
+          <p:cNvPr id="4" name="Content Placeholder 3"/>
+          <p:cNvSpPr>
+            <a:spLocks noGrp="1"/>
+          </p:cNvSpPr>
+          <p:nvPr>
+            <p:ph type="body" idx="2"/>
+          </p:nvPr>
+        </p:nvSpPr>
+        <p:spPr/>
+        <p:txBody>
+          <a:bodyPr/>
+          <a:lstStyle/>
           <a:p>
             <a:r>
               <a:rPr lang="en-US" dirty="0"/>
-              <a:t>All placeholders</a:t>
+              <a:t>Right A</a:t>
             </a:r>
             <a:endParaRPr lang="en-US"/>
           </a:p>
-        </p:txBody>
-      </p:sp>
-      <p:sp>
-        <p:nvSpPr>
-          <p:cNvPr id="4" name="Content Placeholder 3"/>
-          <p:cNvSpPr>
-            <a:spLocks noGrp="1"/>
-          </p:cNvSpPr>
-          <p:nvPr>
-            <p:ph type="body" idx="2"/>
-          </p:nvPr>
-        </p:nvSpPr>
-        <p:spPr/>
-        <p:txBody>
-          <a:bodyPr/>
-          <a:lstStyle/>
           <a:p>
             <a:r>
               <a:rPr lang="en-US" dirty="0"/>
-              <a:t>Works everywhere</a:t>
-            </a:r>
-            <a:endParaRPr lang="en-US"/>
-          </a:p>
-          <a:p>
-            <a:r>
-              <a:rPr lang="en-US" dirty="0"/>
-              <a:t>Full compatibility</a:t>
-            </a:r>
-            <a:endParaRPr lang="en-US"/>
-          </a:p>
-          <a:p>
-            <a:r>
-              <a:rPr lang="en-US" dirty="0"/>
-              <a:t>Python standard library only</a:t>
+              <a:t>Right B</a:t>
             </a:r>
             <a:endParaRPr lang="en-US"/>
           </a:p>

--- a/examples/simple_example.pptx
+++ b/examples/simple_example.pptx
@@ -1,18 +1,24 @@
 
 <file path=ppt/presentation.xml><?xml version="1.0" encoding="utf-8"?>
-<p:presentation xmlns:a="http://schemas.openxmlformats.org/drawingml/2006/main" xmlns:p="http://schemas.openxmlformats.org/presentationml/2006/main" xmlns:r="http://schemas.openxmlformats.org/officeDocument/2006/relationships" saveSubsetFonts="1" autoCompressPictures="0">
+<p:presentation xmlns:a="http://schemas.openxmlformats.org/drawingml/2006/main" xmlns:r="http://schemas.openxmlformats.org/officeDocument/2006/relationships" xmlns:p="http://schemas.openxmlformats.org/presentationml/2006/main" saveSubsetFonts="1" autoCompressPictures="0">
   <p:sldMasterIdLst>
-    <p:sldMasterId r:id="rId1" id="2147483648"/>
+    <p:sldMasterId id="2147483648" r:id="rId1"/>
   </p:sldMasterIdLst>
   <p:sldIdLst>
-    <p:sldId r:id="rId2" id="256"/>
-    <p:sldId r:id="rId3" id="257"/>
-    <p:sldId r:id="rId4" id="258"/>
+    <p:sldId id="256" r:id="rId7"/>
+    <p:sldId id="257" r:id="rId8"/>
+    <p:sldId id="258" r:id="rId9"/>
+    <p:sldId id="259" r:id="rId10"/>
+    <p:sldId id="260" r:id="rId11"/>
+    <p:sldId id="261" r:id="rId12"/>
   </p:sldIdLst>
   <p:sldSz cx="9144000" cy="6858000" type="screen4x3"/>
   <p:notesSz cx="6858000" cy="9144000"/>
   <p:defaultTextStyle>
-    <a:lvl1pPr marL="0" algn="l" defTabSz="914400" rtl="0" eaLnBrk="1" latinLnBrk="0" hangingPunct="1">
+    <a:defPPr>
+      <a:defRPr lang="en-US"/>
+    </a:defPPr>
+    <a:lvl1pPr marL="0" algn="l" defTabSz="457200" rtl="0" eaLnBrk="1" latinLnBrk="0" hangingPunct="1">
       <a:defRPr sz="1800" kern="1200">
         <a:solidFill>
           <a:schemeClr val="tx1"/>
@@ -22,7 +28,7 @@
         <a:cs typeface="+mn-cs"/>
       </a:defRPr>
     </a:lvl1pPr>
-    <a:lvl2pPr marL="457200" algn="l" defTabSz="914400" rtl="0" eaLnBrk="1" latinLnBrk="0" hangingPunct="1">
+    <a:lvl2pPr marL="457200" algn="l" defTabSz="457200" rtl="0" eaLnBrk="1" latinLnBrk="0" hangingPunct="1">
       <a:defRPr sz="1800" kern="1200">
         <a:solidFill>
           <a:schemeClr val="tx1"/>
@@ -32,8 +38,8 @@
         <a:cs typeface="+mn-cs"/>
       </a:defRPr>
     </a:lvl2pPr>
-    <a:lvl3pPr marL="914400" algn="l" defTabSz="914400" rtl="0" eaLnBrk="1" latinLnBrk="0" hangingPunct="1">
-      <a:defRPr sz="1600" kern="1200">
+    <a:lvl3pPr marL="914400" algn="l" defTabSz="457200" rtl="0" eaLnBrk="1" latinLnBrk="0" hangingPunct="1">
+      <a:defRPr sz="1800" kern="1200">
         <a:solidFill>
           <a:schemeClr val="tx1"/>
         </a:solidFill>
@@ -42,8 +48,8 @@
         <a:cs typeface="+mn-cs"/>
       </a:defRPr>
     </a:lvl3pPr>
-    <a:lvl4pPr marL="1371600" algn="l" defTabSz="914400" rtl="0" eaLnBrk="1" latinLnBrk="0" hangingPunct="1">
-      <a:defRPr sz="1600" kern="1200">
+    <a:lvl4pPr marL="1371600" algn="l" defTabSz="457200" rtl="0" eaLnBrk="1" latinLnBrk="0" hangingPunct="1">
+      <a:defRPr sz="1800" kern="1200">
         <a:solidFill>
           <a:schemeClr val="tx1"/>
         </a:solidFill>
@@ -52,8 +58,8 @@
         <a:cs typeface="+mn-cs"/>
       </a:defRPr>
     </a:lvl4pPr>
-    <a:lvl5pPr marL="1828800" algn="l" defTabSz="914400" rtl="0" eaLnBrk="1" latinLnBrk="0" hangingPunct="1">
-      <a:defRPr sz="1600" kern="1200">
+    <a:lvl5pPr marL="1828800" algn="l" defTabSz="457200" rtl="0" eaLnBrk="1" latinLnBrk="0" hangingPunct="1">
+      <a:defRPr sz="1800" kern="1200">
         <a:solidFill>
           <a:schemeClr val="tx1"/>
         </a:solidFill>
@@ -62,8 +68,8 @@
         <a:cs typeface="+mn-cs"/>
       </a:defRPr>
     </a:lvl5pPr>
-    <a:lvl6pPr marL="2286000" algn="l" defTabSz="914400" rtl="0" eaLnBrk="1" latinLnBrk="0" hangingPunct="1">
-      <a:defRPr sz="1600" kern="1200">
+    <a:lvl6pPr marL="2286000" algn="l" defTabSz="457200" rtl="0" eaLnBrk="1" latinLnBrk="0" hangingPunct="1">
+      <a:defRPr sz="1800" kern="1200">
         <a:solidFill>
           <a:schemeClr val="tx1"/>
         </a:solidFill>
@@ -72,8 +78,8 @@
         <a:cs typeface="+mn-cs"/>
       </a:defRPr>
     </a:lvl6pPr>
-    <a:lvl7pPr marL="2743200" algn="l" defTabSz="914400" rtl="0" eaLnBrk="1" latinLnBrk="0" hangingPunct="1">
-      <a:defRPr sz="1600" kern="1200">
+    <a:lvl7pPr marL="2743200" algn="l" defTabSz="457200" rtl="0" eaLnBrk="1" latinLnBrk="0" hangingPunct="1">
+      <a:defRPr sz="1800" kern="1200">
         <a:solidFill>
           <a:schemeClr val="tx1"/>
         </a:solidFill>
@@ -82,8 +88,8 @@
         <a:cs typeface="+mn-cs"/>
       </a:defRPr>
     </a:lvl7pPr>
-    <a:lvl8pPr marL="3200400" algn="l" defTabSz="914400" rtl="0" eaLnBrk="1" latinLnBrk="0" hangingPunct="1">
-      <a:defRPr sz="1600" kern="1200">
+    <a:lvl8pPr marL="3200400" algn="l" defTabSz="457200" rtl="0" eaLnBrk="1" latinLnBrk="0" hangingPunct="1">
+      <a:defRPr sz="1800" kern="1200">
         <a:solidFill>
           <a:schemeClr val="tx1"/>
         </a:solidFill>
@@ -92,8 +98,8 @@
         <a:cs typeface="+mn-cs"/>
       </a:defRPr>
     </a:lvl8pPr>
-    <a:lvl9pPr marL="3657600" algn="l" defTabSz="914400" rtl="0" eaLnBrk="1" latinLnBrk="0" hangingPunct="1">
-      <a:defRPr sz="1600" kern="1200">
+    <a:lvl9pPr marL="3657600" algn="l" defTabSz="457200" rtl="0" eaLnBrk="1" latinLnBrk="0" hangingPunct="1">
+      <a:defRPr sz="1800" kern="1200">
         <a:solidFill>
           <a:schemeClr val="tx1"/>
         </a:solidFill>
@@ -107,7 +113,7 @@
 </file>
 
 <file path=ppt/slideLayouts/slideLayout1.xml><?xml version="1.0" encoding="utf-8"?>
-<p:sldLayout xmlns:a="http://schemas.openxmlformats.org/drawingml/2006/main" xmlns:p="http://schemas.openxmlformats.org/presentationml/2006/main" type="title" preserve="1">
+<p:sldLayout xmlns:a="http://schemas.openxmlformats.org/drawingml/2006/main" xmlns:r="http://schemas.openxmlformats.org/officeDocument/2006/relationships" xmlns:p="http://schemas.openxmlformats.org/presentationml/2006/main" type="title" preserve="1">
   <p:cSld name="Title Slide">
     <p:spTree>
       <p:nvGrpSpPr>
@@ -133,11 +139,20 @@
             <p:ph type="ctrTitle"/>
           </p:nvPr>
         </p:nvSpPr>
-        <p:spPr/>
-        <p:txBody>
-          <a:bodyPr/>
-          <a:lstStyle/>
-          <a:p>
+        <p:spPr>
+          <a:xfrm>
+            <a:off x="685800" y="2130425"/>
+            <a:ext cx="7772400" cy="1470025"/>
+          </a:xfrm>
+        </p:spPr>
+        <p:txBody>
+          <a:bodyPr/>
+          <a:lstStyle/>
+          <a:p>
+            <a:r>
+              <a:rPr lang="en-US" smtClean="0"/>
+              <a:t>Click to edit Master title style</a:t>
+            </a:r>
             <a:endParaRPr lang="en-US"/>
           </a:p>
         </p:txBody>
@@ -152,22 +167,195 @@
             <p:ph type="subTitle" idx="1"/>
           </p:nvPr>
         </p:nvSpPr>
-        <p:spPr/>
-        <p:txBody>
-          <a:bodyPr/>
-          <a:lstStyle/>
-          <a:p>
+        <p:spPr>
+          <a:xfrm>
+            <a:off x="1371600" y="3886200"/>
+            <a:ext cx="6400800" cy="1752600"/>
+          </a:xfrm>
+        </p:spPr>
+        <p:txBody>
+          <a:bodyPr/>
+          <a:lstStyle>
+            <a:lvl1pPr marL="0" indent="0" algn="ctr">
+              <a:buNone/>
+              <a:defRPr>
+                <a:solidFill>
+                  <a:schemeClr val="tx1">
+                    <a:tint val="75000"/>
+                  </a:schemeClr>
+                </a:solidFill>
+              </a:defRPr>
+            </a:lvl1pPr>
+            <a:lvl2pPr marL="457200" indent="0" algn="ctr">
+              <a:buNone/>
+              <a:defRPr>
+                <a:solidFill>
+                  <a:schemeClr val="tx1">
+                    <a:tint val="75000"/>
+                  </a:schemeClr>
+                </a:solidFill>
+              </a:defRPr>
+            </a:lvl2pPr>
+            <a:lvl3pPr marL="914400" indent="0" algn="ctr">
+              <a:buNone/>
+              <a:defRPr>
+                <a:solidFill>
+                  <a:schemeClr val="tx1">
+                    <a:tint val="75000"/>
+                  </a:schemeClr>
+                </a:solidFill>
+              </a:defRPr>
+            </a:lvl3pPr>
+            <a:lvl4pPr marL="1371600" indent="0" algn="ctr">
+              <a:buNone/>
+              <a:defRPr>
+                <a:solidFill>
+                  <a:schemeClr val="tx1">
+                    <a:tint val="75000"/>
+                  </a:schemeClr>
+                </a:solidFill>
+              </a:defRPr>
+            </a:lvl4pPr>
+            <a:lvl5pPr marL="1828800" indent="0" algn="ctr">
+              <a:buNone/>
+              <a:defRPr>
+                <a:solidFill>
+                  <a:schemeClr val="tx1">
+                    <a:tint val="75000"/>
+                  </a:schemeClr>
+                </a:solidFill>
+              </a:defRPr>
+            </a:lvl5pPr>
+            <a:lvl6pPr marL="2286000" indent="0" algn="ctr">
+              <a:buNone/>
+              <a:defRPr>
+                <a:solidFill>
+                  <a:schemeClr val="tx1">
+                    <a:tint val="75000"/>
+                  </a:schemeClr>
+                </a:solidFill>
+              </a:defRPr>
+            </a:lvl6pPr>
+            <a:lvl7pPr marL="2743200" indent="0" algn="ctr">
+              <a:buNone/>
+              <a:defRPr>
+                <a:solidFill>
+                  <a:schemeClr val="tx1">
+                    <a:tint val="75000"/>
+                  </a:schemeClr>
+                </a:solidFill>
+              </a:defRPr>
+            </a:lvl7pPr>
+            <a:lvl8pPr marL="3200400" indent="0" algn="ctr">
+              <a:buNone/>
+              <a:defRPr>
+                <a:solidFill>
+                  <a:schemeClr val="tx1">
+                    <a:tint val="75000"/>
+                  </a:schemeClr>
+                </a:solidFill>
+              </a:defRPr>
+            </a:lvl8pPr>
+            <a:lvl9pPr marL="3657600" indent="0" algn="ctr">
+              <a:buNone/>
+              <a:defRPr>
+                <a:solidFill>
+                  <a:schemeClr val="tx1">
+                    <a:tint val="75000"/>
+                  </a:schemeClr>
+                </a:solidFill>
+              </a:defRPr>
+            </a:lvl9pPr>
+          </a:lstStyle>
+          <a:p>
+            <a:r>
+              <a:rPr lang="en-US" smtClean="0"/>
+              <a:t>Click to edit Master subtitle style</a:t>
+            </a:r>
+            <a:endParaRPr lang="en-US"/>
+          </a:p>
+        </p:txBody>
+      </p:sp>
+      <p:sp>
+        <p:nvSpPr>
+          <p:cNvPr id="4" name="Date Placeholder 3"/>
+          <p:cNvSpPr>
+            <a:spLocks noGrp="1"/>
+          </p:cNvSpPr>
+          <p:nvPr>
+            <p:ph type="dt" sz="half" idx="10"/>
+          </p:nvPr>
+        </p:nvSpPr>
+        <p:spPr/>
+        <p:txBody>
+          <a:bodyPr/>
+          <a:lstStyle/>
+          <a:p>
+            <a:fld id="{5BCAD085-E8A6-8845-BD4E-CB4CCA059FC4}" type="datetimeFigureOut">
+              <a:rPr lang="en-US" smtClean="0"/>
+              <a:t>1/27/13</a:t>
+            </a:fld>
+            <a:endParaRPr lang="en-US"/>
+          </a:p>
+        </p:txBody>
+      </p:sp>
+      <p:sp>
+        <p:nvSpPr>
+          <p:cNvPr id="5" name="Footer Placeholder 4"/>
+          <p:cNvSpPr>
+            <a:spLocks noGrp="1"/>
+          </p:cNvSpPr>
+          <p:nvPr>
+            <p:ph type="ftr" sz="quarter" idx="11"/>
+          </p:nvPr>
+        </p:nvSpPr>
+        <p:spPr/>
+        <p:txBody>
+          <a:bodyPr/>
+          <a:lstStyle/>
+          <a:p>
+            <a:endParaRPr lang="en-US"/>
+          </a:p>
+        </p:txBody>
+      </p:sp>
+      <p:sp>
+        <p:nvSpPr>
+          <p:cNvPr id="6" name="Slide Number Placeholder 5"/>
+          <p:cNvSpPr>
+            <a:spLocks noGrp="1"/>
+          </p:cNvSpPr>
+          <p:nvPr>
+            <p:ph type="sldNum" sz="quarter" idx="12"/>
+          </p:nvPr>
+        </p:nvSpPr>
+        <p:spPr/>
+        <p:txBody>
+          <a:bodyPr/>
+          <a:lstStyle/>
+          <a:p>
+            <a:fld id="{C1FF6DA9-008F-8B48-92A6-B652298478BF}" type="slidenum">
+              <a:rPr lang="en-US" smtClean="0"/>
+              <a:t>‹#›</a:t>
+            </a:fld>
             <a:endParaRPr lang="en-US"/>
           </a:p>
         </p:txBody>
       </p:sp>
     </p:spTree>
+    <p:extLst>
+      <p:ext uri="{BB962C8B-B14F-4D97-AF65-F5344CB8AC3E}">
+        <p14:creationId xmlns:p14="http://schemas.microsoft.com/office/powerpoint/2010/main" val="3168075583"/>
+      </p:ext>
+    </p:extLst>
   </p:cSld>
+  <p:clrMapOvr>
+    <a:masterClrMapping/>
+  </p:clrMapOvr>
 </p:sldLayout>
 </file>
 
 <file path=ppt/slideLayouts/slideLayout10.xml><?xml version="1.0" encoding="utf-8"?>
-<p:sldLayout xmlns:a="http://schemas.openxmlformats.org/drawingml/2006/main" xmlns:p="http://schemas.openxmlformats.org/presentationml/2006/main" type="vertTx" preserve="1">
+<p:sldLayout xmlns:a="http://schemas.openxmlformats.org/drawingml/2006/main" xmlns:r="http://schemas.openxmlformats.org/officeDocument/2006/relationships" xmlns:p="http://schemas.openxmlformats.org/presentationml/2006/main" type="vertTx" preserve="1">
   <p:cSld name="Title and Vertical Text">
     <p:spTree>
       <p:nvGrpSpPr>
@@ -198,6 +386,10 @@
           <a:bodyPr/>
           <a:lstStyle/>
           <a:p>
+            <a:r>
+              <a:rPr lang="en-US" smtClean="0"/>
+              <a:t>Click to edit Master title style</a:t>
+            </a:r>
             <a:endParaRPr lang="en-US"/>
           </a:p>
         </p:txBody>
@@ -209,25 +401,131 @@
             <a:spLocks noGrp="1"/>
           </p:cNvSpPr>
           <p:nvPr>
-            <p:ph type="body" idx="1"/>
-          </p:nvPr>
-        </p:nvSpPr>
-        <p:spPr/>
-        <p:txBody>
-          <a:bodyPr/>
-          <a:lstStyle/>
-          <a:p>
+            <p:ph type="body" orient="vert" idx="1"/>
+          </p:nvPr>
+        </p:nvSpPr>
+        <p:spPr/>
+        <p:txBody>
+          <a:bodyPr vert="eaVert"/>
+          <a:lstStyle/>
+          <a:p>
+            <a:pPr lvl="0"/>
+            <a:r>
+              <a:rPr lang="en-US" smtClean="0"/>
+              <a:t>Click to edit Master text styles</a:t>
+            </a:r>
+          </a:p>
+          <a:p>
+            <a:pPr lvl="1"/>
+            <a:r>
+              <a:rPr lang="en-US" smtClean="0"/>
+              <a:t>Second level</a:t>
+            </a:r>
+          </a:p>
+          <a:p>
+            <a:pPr lvl="2"/>
+            <a:r>
+              <a:rPr lang="en-US" smtClean="0"/>
+              <a:t>Third level</a:t>
+            </a:r>
+          </a:p>
+          <a:p>
+            <a:pPr lvl="3"/>
+            <a:r>
+              <a:rPr lang="en-US" smtClean="0"/>
+              <a:t>Fourth level</a:t>
+            </a:r>
+          </a:p>
+          <a:p>
+            <a:pPr lvl="4"/>
+            <a:r>
+              <a:rPr lang="en-US" smtClean="0"/>
+              <a:t>Fifth level</a:t>
+            </a:r>
+            <a:endParaRPr lang="en-US"/>
+          </a:p>
+        </p:txBody>
+      </p:sp>
+      <p:sp>
+        <p:nvSpPr>
+          <p:cNvPr id="4" name="Date Placeholder 3"/>
+          <p:cNvSpPr>
+            <a:spLocks noGrp="1"/>
+          </p:cNvSpPr>
+          <p:nvPr>
+            <p:ph type="dt" sz="half" idx="10"/>
+          </p:nvPr>
+        </p:nvSpPr>
+        <p:spPr/>
+        <p:txBody>
+          <a:bodyPr/>
+          <a:lstStyle/>
+          <a:p>
+            <a:fld id="{5BCAD085-E8A6-8845-BD4E-CB4CCA059FC4}" type="datetimeFigureOut">
+              <a:rPr lang="en-US" smtClean="0"/>
+              <a:t>1/27/13</a:t>
+            </a:fld>
+            <a:endParaRPr lang="en-US"/>
+          </a:p>
+        </p:txBody>
+      </p:sp>
+      <p:sp>
+        <p:nvSpPr>
+          <p:cNvPr id="5" name="Footer Placeholder 4"/>
+          <p:cNvSpPr>
+            <a:spLocks noGrp="1"/>
+          </p:cNvSpPr>
+          <p:nvPr>
+            <p:ph type="ftr" sz="quarter" idx="11"/>
+          </p:nvPr>
+        </p:nvSpPr>
+        <p:spPr/>
+        <p:txBody>
+          <a:bodyPr/>
+          <a:lstStyle/>
+          <a:p>
+            <a:endParaRPr lang="en-US"/>
+          </a:p>
+        </p:txBody>
+      </p:sp>
+      <p:sp>
+        <p:nvSpPr>
+          <p:cNvPr id="6" name="Slide Number Placeholder 5"/>
+          <p:cNvSpPr>
+            <a:spLocks noGrp="1"/>
+          </p:cNvSpPr>
+          <p:nvPr>
+            <p:ph type="sldNum" sz="quarter" idx="12"/>
+          </p:nvPr>
+        </p:nvSpPr>
+        <p:spPr/>
+        <p:txBody>
+          <a:bodyPr/>
+          <a:lstStyle/>
+          <a:p>
+            <a:fld id="{C1FF6DA9-008F-8B48-92A6-B652298478BF}" type="slidenum">
+              <a:rPr lang="en-US" smtClean="0"/>
+              <a:t>‹#›</a:t>
+            </a:fld>
             <a:endParaRPr lang="en-US"/>
           </a:p>
         </p:txBody>
       </p:sp>
     </p:spTree>
+    <p:extLst>
+      <p:ext uri="{BB962C8B-B14F-4D97-AF65-F5344CB8AC3E}">
+        <p14:creationId xmlns:p14="http://schemas.microsoft.com/office/powerpoint/2010/main" val="2910927964"/>
+      </p:ext>
+    </p:extLst>
   </p:cSld>
+  <p:clrMapOvr>
+    <a:masterClrMapping/>
+  </p:clrMapOvr>
 </p:sldLayout>
 </file>
 
 <file path=ppt/slideLayouts/slideLayout11.xml><?xml version="1.0" encoding="utf-8"?>
-<p:sldLayout xmlns:a="http://schemas.openxmlformats.org/drawingml/2006/main" xmlns:p="http://schemas.openxmlformats.org/presentationml/2006/main" type="vertTitleAndTx" preserve="1">
+<p:sldLayout xmlns:a="http://schemas.openxmlformats.org/drawingml/2006/main" xmlns:r="http://schemas.openxmlformats.org/officeDocument/2006/relationships" xmlns:p="http://schemas.openxmlformats.org/presentationml/2006/main" type="vertTitleAndTx" preserve="1">
   <p:cSld name="Vertical Title and Text">
     <p:spTree>
       <p:nvGrpSpPr>
@@ -250,14 +548,23 @@
             <a:spLocks noGrp="1"/>
           </p:cNvSpPr>
           <p:nvPr>
-            <p:ph type="title"/>
-          </p:nvPr>
-        </p:nvSpPr>
-        <p:spPr/>
-        <p:txBody>
-          <a:bodyPr/>
-          <a:lstStyle/>
-          <a:p>
+            <p:ph type="title" orient="vert"/>
+          </p:nvPr>
+        </p:nvSpPr>
+        <p:spPr>
+          <a:xfrm>
+            <a:off x="6629400" y="274638"/>
+            <a:ext cx="2057400" cy="5851525"/>
+          </a:xfrm>
+        </p:spPr>
+        <p:txBody>
+          <a:bodyPr vert="eaVert"/>
+          <a:lstStyle/>
+          <a:p>
+            <a:r>
+              <a:rPr lang="en-US" smtClean="0"/>
+              <a:t>Click to edit Master title style</a:t>
+            </a:r>
             <a:endParaRPr lang="en-US"/>
           </a:p>
         </p:txBody>
@@ -269,25 +576,136 @@
             <a:spLocks noGrp="1"/>
           </p:cNvSpPr>
           <p:nvPr>
-            <p:ph type="body" idx="1"/>
-          </p:nvPr>
-        </p:nvSpPr>
-        <p:spPr/>
-        <p:txBody>
-          <a:bodyPr/>
-          <a:lstStyle/>
-          <a:p>
+            <p:ph type="body" orient="vert" idx="1"/>
+          </p:nvPr>
+        </p:nvSpPr>
+        <p:spPr>
+          <a:xfrm>
+            <a:off x="457200" y="274638"/>
+            <a:ext cx="6019800" cy="5851525"/>
+          </a:xfrm>
+        </p:spPr>
+        <p:txBody>
+          <a:bodyPr vert="eaVert"/>
+          <a:lstStyle/>
+          <a:p>
+            <a:pPr lvl="0"/>
+            <a:r>
+              <a:rPr lang="en-US" smtClean="0"/>
+              <a:t>Click to edit Master text styles</a:t>
+            </a:r>
+          </a:p>
+          <a:p>
+            <a:pPr lvl="1"/>
+            <a:r>
+              <a:rPr lang="en-US" smtClean="0"/>
+              <a:t>Second level</a:t>
+            </a:r>
+          </a:p>
+          <a:p>
+            <a:pPr lvl="2"/>
+            <a:r>
+              <a:rPr lang="en-US" smtClean="0"/>
+              <a:t>Third level</a:t>
+            </a:r>
+          </a:p>
+          <a:p>
+            <a:pPr lvl="3"/>
+            <a:r>
+              <a:rPr lang="en-US" smtClean="0"/>
+              <a:t>Fourth level</a:t>
+            </a:r>
+          </a:p>
+          <a:p>
+            <a:pPr lvl="4"/>
+            <a:r>
+              <a:rPr lang="en-US" smtClean="0"/>
+              <a:t>Fifth level</a:t>
+            </a:r>
+            <a:endParaRPr lang="en-US"/>
+          </a:p>
+        </p:txBody>
+      </p:sp>
+      <p:sp>
+        <p:nvSpPr>
+          <p:cNvPr id="4" name="Date Placeholder 3"/>
+          <p:cNvSpPr>
+            <a:spLocks noGrp="1"/>
+          </p:cNvSpPr>
+          <p:nvPr>
+            <p:ph type="dt" sz="half" idx="10"/>
+          </p:nvPr>
+        </p:nvSpPr>
+        <p:spPr/>
+        <p:txBody>
+          <a:bodyPr/>
+          <a:lstStyle/>
+          <a:p>
+            <a:fld id="{5BCAD085-E8A6-8845-BD4E-CB4CCA059FC4}" type="datetimeFigureOut">
+              <a:rPr lang="en-US" smtClean="0"/>
+              <a:t>1/27/13</a:t>
+            </a:fld>
+            <a:endParaRPr lang="en-US"/>
+          </a:p>
+        </p:txBody>
+      </p:sp>
+      <p:sp>
+        <p:nvSpPr>
+          <p:cNvPr id="5" name="Footer Placeholder 4"/>
+          <p:cNvSpPr>
+            <a:spLocks noGrp="1"/>
+          </p:cNvSpPr>
+          <p:nvPr>
+            <p:ph type="ftr" sz="quarter" idx="11"/>
+          </p:nvPr>
+        </p:nvSpPr>
+        <p:spPr/>
+        <p:txBody>
+          <a:bodyPr/>
+          <a:lstStyle/>
+          <a:p>
+            <a:endParaRPr lang="en-US"/>
+          </a:p>
+        </p:txBody>
+      </p:sp>
+      <p:sp>
+        <p:nvSpPr>
+          <p:cNvPr id="6" name="Slide Number Placeholder 5"/>
+          <p:cNvSpPr>
+            <a:spLocks noGrp="1"/>
+          </p:cNvSpPr>
+          <p:nvPr>
+            <p:ph type="sldNum" sz="quarter" idx="12"/>
+          </p:nvPr>
+        </p:nvSpPr>
+        <p:spPr/>
+        <p:txBody>
+          <a:bodyPr/>
+          <a:lstStyle/>
+          <a:p>
+            <a:fld id="{C1FF6DA9-008F-8B48-92A6-B652298478BF}" type="slidenum">
+              <a:rPr lang="en-US" smtClean="0"/>
+              <a:t>‹#›</a:t>
+            </a:fld>
             <a:endParaRPr lang="en-US"/>
           </a:p>
         </p:txBody>
       </p:sp>
     </p:spTree>
+    <p:extLst>
+      <p:ext uri="{BB962C8B-B14F-4D97-AF65-F5344CB8AC3E}">
+        <p14:creationId xmlns:p14="http://schemas.microsoft.com/office/powerpoint/2010/main" val="3612223792"/>
+      </p:ext>
+    </p:extLst>
   </p:cSld>
+  <p:clrMapOvr>
+    <a:masterClrMapping/>
+  </p:clrMapOvr>
 </p:sldLayout>
 </file>
 
 <file path=ppt/slideLayouts/slideLayout2.xml><?xml version="1.0" encoding="utf-8"?>
-<p:sldLayout xmlns:a="http://schemas.openxmlformats.org/drawingml/2006/main" xmlns:p="http://schemas.openxmlformats.org/presentationml/2006/main" type="obj" preserve="1">
+<p:sldLayout xmlns:a="http://schemas.openxmlformats.org/drawingml/2006/main" xmlns:r="http://schemas.openxmlformats.org/officeDocument/2006/relationships" xmlns:p="http://schemas.openxmlformats.org/presentationml/2006/main" type="obj" preserve="1">
   <p:cSld name="Title and Content">
     <p:spTree>
       <p:nvGrpSpPr>
@@ -318,6 +736,10 @@
           <a:bodyPr/>
           <a:lstStyle/>
           <a:p>
+            <a:r>
+              <a:rPr lang="en-US" smtClean="0"/>
+              <a:t>Click to edit Master title style</a:t>
+            </a:r>
             <a:endParaRPr lang="en-US"/>
           </a:p>
         </p:txBody>
@@ -329,25 +751,131 @@
             <a:spLocks noGrp="1"/>
           </p:cNvSpPr>
           <p:nvPr>
-            <p:ph type="body" idx="1"/>
-          </p:nvPr>
-        </p:nvSpPr>
-        <p:spPr/>
-        <p:txBody>
-          <a:bodyPr/>
-          <a:lstStyle/>
-          <a:p>
+            <p:ph idx="1"/>
+          </p:nvPr>
+        </p:nvSpPr>
+        <p:spPr/>
+        <p:txBody>
+          <a:bodyPr/>
+          <a:lstStyle/>
+          <a:p>
+            <a:pPr lvl="0"/>
+            <a:r>
+              <a:rPr lang="en-US" smtClean="0"/>
+              <a:t>Click to edit Master text styles</a:t>
+            </a:r>
+          </a:p>
+          <a:p>
+            <a:pPr lvl="1"/>
+            <a:r>
+              <a:rPr lang="en-US" smtClean="0"/>
+              <a:t>Second level</a:t>
+            </a:r>
+          </a:p>
+          <a:p>
+            <a:pPr lvl="2"/>
+            <a:r>
+              <a:rPr lang="en-US" smtClean="0"/>
+              <a:t>Third level</a:t>
+            </a:r>
+          </a:p>
+          <a:p>
+            <a:pPr lvl="3"/>
+            <a:r>
+              <a:rPr lang="en-US" smtClean="0"/>
+              <a:t>Fourth level</a:t>
+            </a:r>
+          </a:p>
+          <a:p>
+            <a:pPr lvl="4"/>
+            <a:r>
+              <a:rPr lang="en-US" smtClean="0"/>
+              <a:t>Fifth level</a:t>
+            </a:r>
+            <a:endParaRPr lang="en-US"/>
+          </a:p>
+        </p:txBody>
+      </p:sp>
+      <p:sp>
+        <p:nvSpPr>
+          <p:cNvPr id="4" name="Date Placeholder 3"/>
+          <p:cNvSpPr>
+            <a:spLocks noGrp="1"/>
+          </p:cNvSpPr>
+          <p:nvPr>
+            <p:ph type="dt" sz="half" idx="10"/>
+          </p:nvPr>
+        </p:nvSpPr>
+        <p:spPr/>
+        <p:txBody>
+          <a:bodyPr/>
+          <a:lstStyle/>
+          <a:p>
+            <a:fld id="{5BCAD085-E8A6-8845-BD4E-CB4CCA059FC4}" type="datetimeFigureOut">
+              <a:rPr lang="en-US" smtClean="0"/>
+              <a:t>1/27/13</a:t>
+            </a:fld>
+            <a:endParaRPr lang="en-US"/>
+          </a:p>
+        </p:txBody>
+      </p:sp>
+      <p:sp>
+        <p:nvSpPr>
+          <p:cNvPr id="5" name="Footer Placeholder 4"/>
+          <p:cNvSpPr>
+            <a:spLocks noGrp="1"/>
+          </p:cNvSpPr>
+          <p:nvPr>
+            <p:ph type="ftr" sz="quarter" idx="11"/>
+          </p:nvPr>
+        </p:nvSpPr>
+        <p:spPr/>
+        <p:txBody>
+          <a:bodyPr/>
+          <a:lstStyle/>
+          <a:p>
+            <a:endParaRPr lang="en-US"/>
+          </a:p>
+        </p:txBody>
+      </p:sp>
+      <p:sp>
+        <p:nvSpPr>
+          <p:cNvPr id="6" name="Slide Number Placeholder 5"/>
+          <p:cNvSpPr>
+            <a:spLocks noGrp="1"/>
+          </p:cNvSpPr>
+          <p:nvPr>
+            <p:ph type="sldNum" sz="quarter" idx="12"/>
+          </p:nvPr>
+        </p:nvSpPr>
+        <p:spPr/>
+        <p:txBody>
+          <a:bodyPr/>
+          <a:lstStyle/>
+          <a:p>
+            <a:fld id="{C1FF6DA9-008F-8B48-92A6-B652298478BF}" type="slidenum">
+              <a:rPr lang="en-US" smtClean="0"/>
+              <a:t>‹#›</a:t>
+            </a:fld>
             <a:endParaRPr lang="en-US"/>
           </a:p>
         </p:txBody>
       </p:sp>
     </p:spTree>
+    <p:extLst>
+      <p:ext uri="{BB962C8B-B14F-4D97-AF65-F5344CB8AC3E}">
+        <p14:creationId xmlns:p14="http://schemas.microsoft.com/office/powerpoint/2010/main" val="2614314258"/>
+      </p:ext>
+    </p:extLst>
   </p:cSld>
+  <p:clrMapOvr>
+    <a:masterClrMapping/>
+  </p:clrMapOvr>
 </p:sldLayout>
 </file>
 
 <file path=ppt/slideLayouts/slideLayout3.xml><?xml version="1.0" encoding="utf-8"?>
-<p:sldLayout xmlns:a="http://schemas.openxmlformats.org/drawingml/2006/main" xmlns:p="http://schemas.openxmlformats.org/presentationml/2006/main" type="secHead" preserve="1">
+<p:sldLayout xmlns:a="http://schemas.openxmlformats.org/drawingml/2006/main" xmlns:r="http://schemas.openxmlformats.org/officeDocument/2006/relationships" xmlns:p="http://schemas.openxmlformats.org/presentationml/2006/main" type="secHead" preserve="1">
   <p:cSld name="Section Header">
     <p:spTree>
       <p:nvGrpSpPr>
@@ -373,11 +901,24 @@
             <p:ph type="title"/>
           </p:nvPr>
         </p:nvSpPr>
-        <p:spPr/>
-        <p:txBody>
-          <a:bodyPr/>
-          <a:lstStyle/>
-          <a:p>
+        <p:spPr>
+          <a:xfrm>
+            <a:off x="722313" y="4406900"/>
+            <a:ext cx="7772400" cy="1362075"/>
+          </a:xfrm>
+        </p:spPr>
+        <p:txBody>
+          <a:bodyPr anchor="t"/>
+          <a:lstStyle>
+            <a:lvl1pPr algn="l">
+              <a:defRPr sz="4000" b="1" cap="all"/>
+            </a:lvl1pPr>
+          </a:lstStyle>
+          <a:p>
+            <a:r>
+              <a:rPr lang="en-US" smtClean="0"/>
+              <a:t>Click to edit Master title style</a:t>
+            </a:r>
             <a:endParaRPr lang="en-US"/>
           </a:p>
         </p:txBody>
@@ -392,22 +933,195 @@
             <p:ph type="body" idx="1"/>
           </p:nvPr>
         </p:nvSpPr>
-        <p:spPr/>
-        <p:txBody>
-          <a:bodyPr/>
-          <a:lstStyle/>
-          <a:p>
+        <p:spPr>
+          <a:xfrm>
+            <a:off x="722313" y="2906713"/>
+            <a:ext cx="7772400" cy="1500187"/>
+          </a:xfrm>
+        </p:spPr>
+        <p:txBody>
+          <a:bodyPr anchor="b"/>
+          <a:lstStyle>
+            <a:lvl1pPr marL="0" indent="0">
+              <a:buNone/>
+              <a:defRPr sz="2000">
+                <a:solidFill>
+                  <a:schemeClr val="tx1">
+                    <a:tint val="75000"/>
+                  </a:schemeClr>
+                </a:solidFill>
+              </a:defRPr>
+            </a:lvl1pPr>
+            <a:lvl2pPr marL="457200" indent="0">
+              <a:buNone/>
+              <a:defRPr sz="1800">
+                <a:solidFill>
+                  <a:schemeClr val="tx1">
+                    <a:tint val="75000"/>
+                  </a:schemeClr>
+                </a:solidFill>
+              </a:defRPr>
+            </a:lvl2pPr>
+            <a:lvl3pPr marL="914400" indent="0">
+              <a:buNone/>
+              <a:defRPr sz="1600">
+                <a:solidFill>
+                  <a:schemeClr val="tx1">
+                    <a:tint val="75000"/>
+                  </a:schemeClr>
+                </a:solidFill>
+              </a:defRPr>
+            </a:lvl3pPr>
+            <a:lvl4pPr marL="1371600" indent="0">
+              <a:buNone/>
+              <a:defRPr sz="1400">
+                <a:solidFill>
+                  <a:schemeClr val="tx1">
+                    <a:tint val="75000"/>
+                  </a:schemeClr>
+                </a:solidFill>
+              </a:defRPr>
+            </a:lvl4pPr>
+            <a:lvl5pPr marL="1828800" indent="0">
+              <a:buNone/>
+              <a:defRPr sz="1400">
+                <a:solidFill>
+                  <a:schemeClr val="tx1">
+                    <a:tint val="75000"/>
+                  </a:schemeClr>
+                </a:solidFill>
+              </a:defRPr>
+            </a:lvl5pPr>
+            <a:lvl6pPr marL="2286000" indent="0">
+              <a:buNone/>
+              <a:defRPr sz="1400">
+                <a:solidFill>
+                  <a:schemeClr val="tx1">
+                    <a:tint val="75000"/>
+                  </a:schemeClr>
+                </a:solidFill>
+              </a:defRPr>
+            </a:lvl6pPr>
+            <a:lvl7pPr marL="2743200" indent="0">
+              <a:buNone/>
+              <a:defRPr sz="1400">
+                <a:solidFill>
+                  <a:schemeClr val="tx1">
+                    <a:tint val="75000"/>
+                  </a:schemeClr>
+                </a:solidFill>
+              </a:defRPr>
+            </a:lvl7pPr>
+            <a:lvl8pPr marL="3200400" indent="0">
+              <a:buNone/>
+              <a:defRPr sz="1400">
+                <a:solidFill>
+                  <a:schemeClr val="tx1">
+                    <a:tint val="75000"/>
+                  </a:schemeClr>
+                </a:solidFill>
+              </a:defRPr>
+            </a:lvl8pPr>
+            <a:lvl9pPr marL="3657600" indent="0">
+              <a:buNone/>
+              <a:defRPr sz="1400">
+                <a:solidFill>
+                  <a:schemeClr val="tx1">
+                    <a:tint val="75000"/>
+                  </a:schemeClr>
+                </a:solidFill>
+              </a:defRPr>
+            </a:lvl9pPr>
+          </a:lstStyle>
+          <a:p>
+            <a:pPr lvl="0"/>
+            <a:r>
+              <a:rPr lang="en-US" smtClean="0"/>
+              <a:t>Click to edit Master text styles</a:t>
+            </a:r>
+          </a:p>
+        </p:txBody>
+      </p:sp>
+      <p:sp>
+        <p:nvSpPr>
+          <p:cNvPr id="4" name="Date Placeholder 3"/>
+          <p:cNvSpPr>
+            <a:spLocks noGrp="1"/>
+          </p:cNvSpPr>
+          <p:nvPr>
+            <p:ph type="dt" sz="half" idx="10"/>
+          </p:nvPr>
+        </p:nvSpPr>
+        <p:spPr/>
+        <p:txBody>
+          <a:bodyPr/>
+          <a:lstStyle/>
+          <a:p>
+            <a:fld id="{5BCAD085-E8A6-8845-BD4E-CB4CCA059FC4}" type="datetimeFigureOut">
+              <a:rPr lang="en-US" smtClean="0"/>
+              <a:t>1/27/13</a:t>
+            </a:fld>
+            <a:endParaRPr lang="en-US"/>
+          </a:p>
+        </p:txBody>
+      </p:sp>
+      <p:sp>
+        <p:nvSpPr>
+          <p:cNvPr id="5" name="Footer Placeholder 4"/>
+          <p:cNvSpPr>
+            <a:spLocks noGrp="1"/>
+          </p:cNvSpPr>
+          <p:nvPr>
+            <p:ph type="ftr" sz="quarter" idx="11"/>
+          </p:nvPr>
+        </p:nvSpPr>
+        <p:spPr/>
+        <p:txBody>
+          <a:bodyPr/>
+          <a:lstStyle/>
+          <a:p>
+            <a:endParaRPr lang="en-US"/>
+          </a:p>
+        </p:txBody>
+      </p:sp>
+      <p:sp>
+        <p:nvSpPr>
+          <p:cNvPr id="6" name="Slide Number Placeholder 5"/>
+          <p:cNvSpPr>
+            <a:spLocks noGrp="1"/>
+          </p:cNvSpPr>
+          <p:nvPr>
+            <p:ph type="sldNum" sz="quarter" idx="12"/>
+          </p:nvPr>
+        </p:nvSpPr>
+        <p:spPr/>
+        <p:txBody>
+          <a:bodyPr/>
+          <a:lstStyle/>
+          <a:p>
+            <a:fld id="{C1FF6DA9-008F-8B48-92A6-B652298478BF}" type="slidenum">
+              <a:rPr lang="en-US" smtClean="0"/>
+              <a:t>‹#›</a:t>
+            </a:fld>
             <a:endParaRPr lang="en-US"/>
           </a:p>
         </p:txBody>
       </p:sp>
     </p:spTree>
+    <p:extLst>
+      <p:ext uri="{BB962C8B-B14F-4D97-AF65-F5344CB8AC3E}">
+        <p14:creationId xmlns:p14="http://schemas.microsoft.com/office/powerpoint/2010/main" val="960648375"/>
+      </p:ext>
+    </p:extLst>
   </p:cSld>
+  <p:clrMapOvr>
+    <a:masterClrMapping/>
+  </p:clrMapOvr>
 </p:sldLayout>
 </file>
 
 <file path=ppt/slideLayouts/slideLayout4.xml><?xml version="1.0" encoding="utf-8"?>
-<p:sldLayout xmlns:a="http://schemas.openxmlformats.org/drawingml/2006/main" xmlns:p="http://schemas.openxmlformats.org/presentationml/2006/main" type="twoObj" preserve="1">
+<p:sldLayout xmlns:a="http://schemas.openxmlformats.org/drawingml/2006/main" xmlns:r="http://schemas.openxmlformats.org/officeDocument/2006/relationships" xmlns:p="http://schemas.openxmlformats.org/presentationml/2006/main" type="twoObj" preserve="1">
   <p:cSld name="Two Content">
     <p:spTree>
       <p:nvGrpSpPr>
@@ -438,6 +1152,10 @@
           <a:bodyPr/>
           <a:lstStyle/>
           <a:p>
+            <a:r>
+              <a:rPr lang="en-US" smtClean="0"/>
+              <a:t>Click to edit Master title style</a:t>
+            </a:r>
             <a:endParaRPr lang="en-US"/>
           </a:p>
         </p:txBody>
@@ -449,14 +1167,80 @@
             <a:spLocks noGrp="1"/>
           </p:cNvSpPr>
           <p:nvPr>
-            <p:ph type="body" idx="1"/>
-          </p:nvPr>
-        </p:nvSpPr>
-        <p:spPr/>
-        <p:txBody>
-          <a:bodyPr/>
-          <a:lstStyle/>
-          <a:p>
+            <p:ph sz="half" idx="1"/>
+          </p:nvPr>
+        </p:nvSpPr>
+        <p:spPr>
+          <a:xfrm>
+            <a:off x="457200" y="1600200"/>
+            <a:ext cx="4038600" cy="4525963"/>
+          </a:xfrm>
+        </p:spPr>
+        <p:txBody>
+          <a:bodyPr/>
+          <a:lstStyle>
+            <a:lvl1pPr>
+              <a:defRPr sz="2800"/>
+            </a:lvl1pPr>
+            <a:lvl2pPr>
+              <a:defRPr sz="2400"/>
+            </a:lvl2pPr>
+            <a:lvl3pPr>
+              <a:defRPr sz="2000"/>
+            </a:lvl3pPr>
+            <a:lvl4pPr>
+              <a:defRPr sz="1800"/>
+            </a:lvl4pPr>
+            <a:lvl5pPr>
+              <a:defRPr sz="1800"/>
+            </a:lvl5pPr>
+            <a:lvl6pPr>
+              <a:defRPr sz="1800"/>
+            </a:lvl6pPr>
+            <a:lvl7pPr>
+              <a:defRPr sz="1800"/>
+            </a:lvl7pPr>
+            <a:lvl8pPr>
+              <a:defRPr sz="1800"/>
+            </a:lvl8pPr>
+            <a:lvl9pPr>
+              <a:defRPr sz="1800"/>
+            </a:lvl9pPr>
+          </a:lstStyle>
+          <a:p>
+            <a:pPr lvl="0"/>
+            <a:r>
+              <a:rPr lang="en-US" smtClean="0"/>
+              <a:t>Click to edit Master text styles</a:t>
+            </a:r>
+          </a:p>
+          <a:p>
+            <a:pPr lvl="1"/>
+            <a:r>
+              <a:rPr lang="en-US" smtClean="0"/>
+              <a:t>Second level</a:t>
+            </a:r>
+          </a:p>
+          <a:p>
+            <a:pPr lvl="2"/>
+            <a:r>
+              <a:rPr lang="en-US" smtClean="0"/>
+              <a:t>Third level</a:t>
+            </a:r>
+          </a:p>
+          <a:p>
+            <a:pPr lvl="3"/>
+            <a:r>
+              <a:rPr lang="en-US" smtClean="0"/>
+              <a:t>Fourth level</a:t>
+            </a:r>
+          </a:p>
+          <a:p>
+            <a:pPr lvl="4"/>
+            <a:r>
+              <a:rPr lang="en-US" smtClean="0"/>
+              <a:t>Fifth level</a:t>
+            </a:r>
             <a:endParaRPr lang="en-US"/>
           </a:p>
         </p:txBody>
@@ -468,25 +1252,164 @@
             <a:spLocks noGrp="1"/>
           </p:cNvSpPr>
           <p:nvPr>
-            <p:ph type="body" idx="2"/>
-          </p:nvPr>
-        </p:nvSpPr>
-        <p:spPr/>
-        <p:txBody>
-          <a:bodyPr/>
-          <a:lstStyle/>
-          <a:p>
+            <p:ph sz="half" idx="2"/>
+          </p:nvPr>
+        </p:nvSpPr>
+        <p:spPr>
+          <a:xfrm>
+            <a:off x="4648200" y="1600200"/>
+            <a:ext cx="4038600" cy="4525963"/>
+          </a:xfrm>
+        </p:spPr>
+        <p:txBody>
+          <a:bodyPr/>
+          <a:lstStyle>
+            <a:lvl1pPr>
+              <a:defRPr sz="2800"/>
+            </a:lvl1pPr>
+            <a:lvl2pPr>
+              <a:defRPr sz="2400"/>
+            </a:lvl2pPr>
+            <a:lvl3pPr>
+              <a:defRPr sz="2000"/>
+            </a:lvl3pPr>
+            <a:lvl4pPr>
+              <a:defRPr sz="1800"/>
+            </a:lvl4pPr>
+            <a:lvl5pPr>
+              <a:defRPr sz="1800"/>
+            </a:lvl5pPr>
+            <a:lvl6pPr>
+              <a:defRPr sz="1800"/>
+            </a:lvl6pPr>
+            <a:lvl7pPr>
+              <a:defRPr sz="1800"/>
+            </a:lvl7pPr>
+            <a:lvl8pPr>
+              <a:defRPr sz="1800"/>
+            </a:lvl8pPr>
+            <a:lvl9pPr>
+              <a:defRPr sz="1800"/>
+            </a:lvl9pPr>
+          </a:lstStyle>
+          <a:p>
+            <a:pPr lvl="0"/>
+            <a:r>
+              <a:rPr lang="en-US" smtClean="0"/>
+              <a:t>Click to edit Master text styles</a:t>
+            </a:r>
+          </a:p>
+          <a:p>
+            <a:pPr lvl="1"/>
+            <a:r>
+              <a:rPr lang="en-US" smtClean="0"/>
+              <a:t>Second level</a:t>
+            </a:r>
+          </a:p>
+          <a:p>
+            <a:pPr lvl="2"/>
+            <a:r>
+              <a:rPr lang="en-US" smtClean="0"/>
+              <a:t>Third level</a:t>
+            </a:r>
+          </a:p>
+          <a:p>
+            <a:pPr lvl="3"/>
+            <a:r>
+              <a:rPr lang="en-US" smtClean="0"/>
+              <a:t>Fourth level</a:t>
+            </a:r>
+          </a:p>
+          <a:p>
+            <a:pPr lvl="4"/>
+            <a:r>
+              <a:rPr lang="en-US" smtClean="0"/>
+              <a:t>Fifth level</a:t>
+            </a:r>
+            <a:endParaRPr lang="en-US"/>
+          </a:p>
+        </p:txBody>
+      </p:sp>
+      <p:sp>
+        <p:nvSpPr>
+          <p:cNvPr id="5" name="Date Placeholder 4"/>
+          <p:cNvSpPr>
+            <a:spLocks noGrp="1"/>
+          </p:cNvSpPr>
+          <p:nvPr>
+            <p:ph type="dt" sz="half" idx="10"/>
+          </p:nvPr>
+        </p:nvSpPr>
+        <p:spPr/>
+        <p:txBody>
+          <a:bodyPr/>
+          <a:lstStyle/>
+          <a:p>
+            <a:fld id="{5BCAD085-E8A6-8845-BD4E-CB4CCA059FC4}" type="datetimeFigureOut">
+              <a:rPr lang="en-US" smtClean="0"/>
+              <a:t>1/27/13</a:t>
+            </a:fld>
+            <a:endParaRPr lang="en-US"/>
+          </a:p>
+        </p:txBody>
+      </p:sp>
+      <p:sp>
+        <p:nvSpPr>
+          <p:cNvPr id="6" name="Footer Placeholder 5"/>
+          <p:cNvSpPr>
+            <a:spLocks noGrp="1"/>
+          </p:cNvSpPr>
+          <p:nvPr>
+            <p:ph type="ftr" sz="quarter" idx="11"/>
+          </p:nvPr>
+        </p:nvSpPr>
+        <p:spPr/>
+        <p:txBody>
+          <a:bodyPr/>
+          <a:lstStyle/>
+          <a:p>
+            <a:endParaRPr lang="en-US"/>
+          </a:p>
+        </p:txBody>
+      </p:sp>
+      <p:sp>
+        <p:nvSpPr>
+          <p:cNvPr id="7" name="Slide Number Placeholder 6"/>
+          <p:cNvSpPr>
+            <a:spLocks noGrp="1"/>
+          </p:cNvSpPr>
+          <p:nvPr>
+            <p:ph type="sldNum" sz="quarter" idx="12"/>
+          </p:nvPr>
+        </p:nvSpPr>
+        <p:spPr/>
+        <p:txBody>
+          <a:bodyPr/>
+          <a:lstStyle/>
+          <a:p>
+            <a:fld id="{C1FF6DA9-008F-8B48-92A6-B652298478BF}" type="slidenum">
+              <a:rPr lang="en-US" smtClean="0"/>
+              <a:t>‹#›</a:t>
+            </a:fld>
             <a:endParaRPr lang="en-US"/>
           </a:p>
         </p:txBody>
       </p:sp>
     </p:spTree>
+    <p:extLst>
+      <p:ext uri="{BB962C8B-B14F-4D97-AF65-F5344CB8AC3E}">
+        <p14:creationId xmlns:p14="http://schemas.microsoft.com/office/powerpoint/2010/main" val="2782244947"/>
+      </p:ext>
+    </p:extLst>
   </p:cSld>
+  <p:clrMapOvr>
+    <a:masterClrMapping/>
+  </p:clrMapOvr>
 </p:sldLayout>
 </file>
 
 <file path=ppt/slideLayouts/slideLayout5.xml><?xml version="1.0" encoding="utf-8"?>
-<p:sldLayout xmlns:a="http://schemas.openxmlformats.org/drawingml/2006/main" xmlns:p="http://schemas.openxmlformats.org/presentationml/2006/main" type="twoTxTwoObj" preserve="1">
+<p:sldLayout xmlns:a="http://schemas.openxmlformats.org/drawingml/2006/main" xmlns:r="http://schemas.openxmlformats.org/officeDocument/2006/relationships" xmlns:p="http://schemas.openxmlformats.org/presentationml/2006/main" type="twoTxTwoObj" preserve="1">
   <p:cSld name="Comparison">
     <p:spTree>
       <p:nvGrpSpPr>
@@ -515,8 +1438,16 @@
         <p:spPr/>
         <p:txBody>
           <a:bodyPr/>
-          <a:lstStyle/>
-          <a:p>
+          <a:lstStyle>
+            <a:lvl1pPr>
+              <a:defRPr/>
+            </a:lvl1pPr>
+          </a:lstStyle>
+          <a:p>
+            <a:r>
+              <a:rPr lang="en-US" smtClean="0"/>
+              <a:t>Click to edit Master title style</a:t>
+            </a:r>
             <a:endParaRPr lang="en-US"/>
           </a:p>
         </p:txBody>
@@ -531,41 +1462,376 @@
             <p:ph type="body" idx="1"/>
           </p:nvPr>
         </p:nvSpPr>
-        <p:spPr/>
-        <p:txBody>
-          <a:bodyPr/>
-          <a:lstStyle/>
-          <a:p>
-            <a:endParaRPr lang="en-US"/>
-          </a:p>
-        </p:txBody>
-      </p:sp>
-      <p:sp>
-        <p:nvSpPr>
-          <p:cNvPr id="4" name="Text Placeholder 3"/>
-          <p:cNvSpPr>
-            <a:spLocks noGrp="1"/>
-          </p:cNvSpPr>
-          <p:nvPr>
-            <p:ph type="body" idx="2"/>
-          </p:nvPr>
-        </p:nvSpPr>
-        <p:spPr/>
-        <p:txBody>
-          <a:bodyPr/>
-          <a:lstStyle/>
-          <a:p>
+        <p:spPr>
+          <a:xfrm>
+            <a:off x="457200" y="1535113"/>
+            <a:ext cx="4040188" cy="639762"/>
+          </a:xfrm>
+        </p:spPr>
+        <p:txBody>
+          <a:bodyPr anchor="b"/>
+          <a:lstStyle>
+            <a:lvl1pPr marL="0" indent="0">
+              <a:buNone/>
+              <a:defRPr sz="2400" b="1"/>
+            </a:lvl1pPr>
+            <a:lvl2pPr marL="457200" indent="0">
+              <a:buNone/>
+              <a:defRPr sz="2000" b="1"/>
+            </a:lvl2pPr>
+            <a:lvl3pPr marL="914400" indent="0">
+              <a:buNone/>
+              <a:defRPr sz="1800" b="1"/>
+            </a:lvl3pPr>
+            <a:lvl4pPr marL="1371600" indent="0">
+              <a:buNone/>
+              <a:defRPr sz="1600" b="1"/>
+            </a:lvl4pPr>
+            <a:lvl5pPr marL="1828800" indent="0">
+              <a:buNone/>
+              <a:defRPr sz="1600" b="1"/>
+            </a:lvl5pPr>
+            <a:lvl6pPr marL="2286000" indent="0">
+              <a:buNone/>
+              <a:defRPr sz="1600" b="1"/>
+            </a:lvl6pPr>
+            <a:lvl7pPr marL="2743200" indent="0">
+              <a:buNone/>
+              <a:defRPr sz="1600" b="1"/>
+            </a:lvl7pPr>
+            <a:lvl8pPr marL="3200400" indent="0">
+              <a:buNone/>
+              <a:defRPr sz="1600" b="1"/>
+            </a:lvl8pPr>
+            <a:lvl9pPr marL="3657600" indent="0">
+              <a:buNone/>
+              <a:defRPr sz="1600" b="1"/>
+            </a:lvl9pPr>
+          </a:lstStyle>
+          <a:p>
+            <a:pPr lvl="0"/>
+            <a:r>
+              <a:rPr lang="en-US" smtClean="0"/>
+              <a:t>Click to edit Master text styles</a:t>
+            </a:r>
+          </a:p>
+        </p:txBody>
+      </p:sp>
+      <p:sp>
+        <p:nvSpPr>
+          <p:cNvPr id="4" name="Content Placeholder 3"/>
+          <p:cNvSpPr>
+            <a:spLocks noGrp="1"/>
+          </p:cNvSpPr>
+          <p:nvPr>
+            <p:ph sz="half" idx="2"/>
+          </p:nvPr>
+        </p:nvSpPr>
+        <p:spPr>
+          <a:xfrm>
+            <a:off x="457200" y="2174875"/>
+            <a:ext cx="4040188" cy="3951288"/>
+          </a:xfrm>
+        </p:spPr>
+        <p:txBody>
+          <a:bodyPr/>
+          <a:lstStyle>
+            <a:lvl1pPr>
+              <a:defRPr sz="2400"/>
+            </a:lvl1pPr>
+            <a:lvl2pPr>
+              <a:defRPr sz="2000"/>
+            </a:lvl2pPr>
+            <a:lvl3pPr>
+              <a:defRPr sz="1800"/>
+            </a:lvl3pPr>
+            <a:lvl4pPr>
+              <a:defRPr sz="1600"/>
+            </a:lvl4pPr>
+            <a:lvl5pPr>
+              <a:defRPr sz="1600"/>
+            </a:lvl5pPr>
+            <a:lvl6pPr>
+              <a:defRPr sz="1600"/>
+            </a:lvl6pPr>
+            <a:lvl7pPr>
+              <a:defRPr sz="1600"/>
+            </a:lvl7pPr>
+            <a:lvl8pPr>
+              <a:defRPr sz="1600"/>
+            </a:lvl8pPr>
+            <a:lvl9pPr>
+              <a:defRPr sz="1600"/>
+            </a:lvl9pPr>
+          </a:lstStyle>
+          <a:p>
+            <a:pPr lvl="0"/>
+            <a:r>
+              <a:rPr lang="en-US" smtClean="0"/>
+              <a:t>Click to edit Master text styles</a:t>
+            </a:r>
+          </a:p>
+          <a:p>
+            <a:pPr lvl="1"/>
+            <a:r>
+              <a:rPr lang="en-US" smtClean="0"/>
+              <a:t>Second level</a:t>
+            </a:r>
+          </a:p>
+          <a:p>
+            <a:pPr lvl="2"/>
+            <a:r>
+              <a:rPr lang="en-US" smtClean="0"/>
+              <a:t>Third level</a:t>
+            </a:r>
+          </a:p>
+          <a:p>
+            <a:pPr lvl="3"/>
+            <a:r>
+              <a:rPr lang="en-US" smtClean="0"/>
+              <a:t>Fourth level</a:t>
+            </a:r>
+          </a:p>
+          <a:p>
+            <a:pPr lvl="4"/>
+            <a:r>
+              <a:rPr lang="en-US" smtClean="0"/>
+              <a:t>Fifth level</a:t>
+            </a:r>
+            <a:endParaRPr lang="en-US"/>
+          </a:p>
+        </p:txBody>
+      </p:sp>
+      <p:sp>
+        <p:nvSpPr>
+          <p:cNvPr id="5" name="Text Placeholder 4"/>
+          <p:cNvSpPr>
+            <a:spLocks noGrp="1"/>
+          </p:cNvSpPr>
+          <p:nvPr>
+            <p:ph type="body" sz="quarter" idx="3"/>
+          </p:nvPr>
+        </p:nvSpPr>
+        <p:spPr>
+          <a:xfrm>
+            <a:off x="4645025" y="1535113"/>
+            <a:ext cx="4041775" cy="639762"/>
+          </a:xfrm>
+        </p:spPr>
+        <p:txBody>
+          <a:bodyPr anchor="b"/>
+          <a:lstStyle>
+            <a:lvl1pPr marL="0" indent="0">
+              <a:buNone/>
+              <a:defRPr sz="2400" b="1"/>
+            </a:lvl1pPr>
+            <a:lvl2pPr marL="457200" indent="0">
+              <a:buNone/>
+              <a:defRPr sz="2000" b="1"/>
+            </a:lvl2pPr>
+            <a:lvl3pPr marL="914400" indent="0">
+              <a:buNone/>
+              <a:defRPr sz="1800" b="1"/>
+            </a:lvl3pPr>
+            <a:lvl4pPr marL="1371600" indent="0">
+              <a:buNone/>
+              <a:defRPr sz="1600" b="1"/>
+            </a:lvl4pPr>
+            <a:lvl5pPr marL="1828800" indent="0">
+              <a:buNone/>
+              <a:defRPr sz="1600" b="1"/>
+            </a:lvl5pPr>
+            <a:lvl6pPr marL="2286000" indent="0">
+              <a:buNone/>
+              <a:defRPr sz="1600" b="1"/>
+            </a:lvl6pPr>
+            <a:lvl7pPr marL="2743200" indent="0">
+              <a:buNone/>
+              <a:defRPr sz="1600" b="1"/>
+            </a:lvl7pPr>
+            <a:lvl8pPr marL="3200400" indent="0">
+              <a:buNone/>
+              <a:defRPr sz="1600" b="1"/>
+            </a:lvl8pPr>
+            <a:lvl9pPr marL="3657600" indent="0">
+              <a:buNone/>
+              <a:defRPr sz="1600" b="1"/>
+            </a:lvl9pPr>
+          </a:lstStyle>
+          <a:p>
+            <a:pPr lvl="0"/>
+            <a:r>
+              <a:rPr lang="en-US" smtClean="0"/>
+              <a:t>Click to edit Master text styles</a:t>
+            </a:r>
+          </a:p>
+        </p:txBody>
+      </p:sp>
+      <p:sp>
+        <p:nvSpPr>
+          <p:cNvPr id="6" name="Content Placeholder 5"/>
+          <p:cNvSpPr>
+            <a:spLocks noGrp="1"/>
+          </p:cNvSpPr>
+          <p:nvPr>
+            <p:ph sz="quarter" idx="4"/>
+          </p:nvPr>
+        </p:nvSpPr>
+        <p:spPr>
+          <a:xfrm>
+            <a:off x="4645025" y="2174875"/>
+            <a:ext cx="4041775" cy="3951288"/>
+          </a:xfrm>
+        </p:spPr>
+        <p:txBody>
+          <a:bodyPr/>
+          <a:lstStyle>
+            <a:lvl1pPr>
+              <a:defRPr sz="2400"/>
+            </a:lvl1pPr>
+            <a:lvl2pPr>
+              <a:defRPr sz="2000"/>
+            </a:lvl2pPr>
+            <a:lvl3pPr>
+              <a:defRPr sz="1800"/>
+            </a:lvl3pPr>
+            <a:lvl4pPr>
+              <a:defRPr sz="1600"/>
+            </a:lvl4pPr>
+            <a:lvl5pPr>
+              <a:defRPr sz="1600"/>
+            </a:lvl5pPr>
+            <a:lvl6pPr>
+              <a:defRPr sz="1600"/>
+            </a:lvl6pPr>
+            <a:lvl7pPr>
+              <a:defRPr sz="1600"/>
+            </a:lvl7pPr>
+            <a:lvl8pPr>
+              <a:defRPr sz="1600"/>
+            </a:lvl8pPr>
+            <a:lvl9pPr>
+              <a:defRPr sz="1600"/>
+            </a:lvl9pPr>
+          </a:lstStyle>
+          <a:p>
+            <a:pPr lvl="0"/>
+            <a:r>
+              <a:rPr lang="en-US" smtClean="0"/>
+              <a:t>Click to edit Master text styles</a:t>
+            </a:r>
+          </a:p>
+          <a:p>
+            <a:pPr lvl="1"/>
+            <a:r>
+              <a:rPr lang="en-US" smtClean="0"/>
+              <a:t>Second level</a:t>
+            </a:r>
+          </a:p>
+          <a:p>
+            <a:pPr lvl="2"/>
+            <a:r>
+              <a:rPr lang="en-US" smtClean="0"/>
+              <a:t>Third level</a:t>
+            </a:r>
+          </a:p>
+          <a:p>
+            <a:pPr lvl="3"/>
+            <a:r>
+              <a:rPr lang="en-US" smtClean="0"/>
+              <a:t>Fourth level</a:t>
+            </a:r>
+          </a:p>
+          <a:p>
+            <a:pPr lvl="4"/>
+            <a:r>
+              <a:rPr lang="en-US" smtClean="0"/>
+              <a:t>Fifth level</a:t>
+            </a:r>
+            <a:endParaRPr lang="en-US"/>
+          </a:p>
+        </p:txBody>
+      </p:sp>
+      <p:sp>
+        <p:nvSpPr>
+          <p:cNvPr id="7" name="Date Placeholder 6"/>
+          <p:cNvSpPr>
+            <a:spLocks noGrp="1"/>
+          </p:cNvSpPr>
+          <p:nvPr>
+            <p:ph type="dt" sz="half" idx="10"/>
+          </p:nvPr>
+        </p:nvSpPr>
+        <p:spPr/>
+        <p:txBody>
+          <a:bodyPr/>
+          <a:lstStyle/>
+          <a:p>
+            <a:fld id="{5BCAD085-E8A6-8845-BD4E-CB4CCA059FC4}" type="datetimeFigureOut">
+              <a:rPr lang="en-US" smtClean="0"/>
+              <a:t>1/27/13</a:t>
+            </a:fld>
+            <a:endParaRPr lang="en-US"/>
+          </a:p>
+        </p:txBody>
+      </p:sp>
+      <p:sp>
+        <p:nvSpPr>
+          <p:cNvPr id="8" name="Footer Placeholder 7"/>
+          <p:cNvSpPr>
+            <a:spLocks noGrp="1"/>
+          </p:cNvSpPr>
+          <p:nvPr>
+            <p:ph type="ftr" sz="quarter" idx="11"/>
+          </p:nvPr>
+        </p:nvSpPr>
+        <p:spPr/>
+        <p:txBody>
+          <a:bodyPr/>
+          <a:lstStyle/>
+          <a:p>
+            <a:endParaRPr lang="en-US"/>
+          </a:p>
+        </p:txBody>
+      </p:sp>
+      <p:sp>
+        <p:nvSpPr>
+          <p:cNvPr id="9" name="Slide Number Placeholder 8"/>
+          <p:cNvSpPr>
+            <a:spLocks noGrp="1"/>
+          </p:cNvSpPr>
+          <p:nvPr>
+            <p:ph type="sldNum" sz="quarter" idx="12"/>
+          </p:nvPr>
+        </p:nvSpPr>
+        <p:spPr/>
+        <p:txBody>
+          <a:bodyPr/>
+          <a:lstStyle/>
+          <a:p>
+            <a:fld id="{C1FF6DA9-008F-8B48-92A6-B652298478BF}" type="slidenum">
+              <a:rPr lang="en-US" smtClean="0"/>
+              <a:t>‹#›</a:t>
+            </a:fld>
             <a:endParaRPr lang="en-US"/>
           </a:p>
         </p:txBody>
       </p:sp>
     </p:spTree>
+    <p:extLst>
+      <p:ext uri="{BB962C8B-B14F-4D97-AF65-F5344CB8AC3E}">
+        <p14:creationId xmlns:p14="http://schemas.microsoft.com/office/powerpoint/2010/main" val="990158736"/>
+      </p:ext>
+    </p:extLst>
   </p:cSld>
+  <p:clrMapOvr>
+    <a:masterClrMapping/>
+  </p:clrMapOvr>
 </p:sldLayout>
 </file>
 
 <file path=ppt/slideLayouts/slideLayout6.xml><?xml version="1.0" encoding="utf-8"?>
-<p:sldLayout xmlns:a="http://schemas.openxmlformats.org/drawingml/2006/main" xmlns:p="http://schemas.openxmlformats.org/presentationml/2006/main" type="titleOnly" preserve="1">
+<p:sldLayout xmlns:a="http://schemas.openxmlformats.org/drawingml/2006/main" xmlns:r="http://schemas.openxmlformats.org/officeDocument/2006/relationships" xmlns:p="http://schemas.openxmlformats.org/presentationml/2006/main" type="titleOnly" preserve="1">
   <p:cSld name="Title Only">
     <p:spTree>
       <p:nvGrpSpPr>
@@ -596,17 +1862,94 @@
           <a:bodyPr/>
           <a:lstStyle/>
           <a:p>
+            <a:r>
+              <a:rPr lang="en-US" smtClean="0"/>
+              <a:t>Click to edit Master title style</a:t>
+            </a:r>
+            <a:endParaRPr lang="en-US"/>
+          </a:p>
+        </p:txBody>
+      </p:sp>
+      <p:sp>
+        <p:nvSpPr>
+          <p:cNvPr id="3" name="Date Placeholder 2"/>
+          <p:cNvSpPr>
+            <a:spLocks noGrp="1"/>
+          </p:cNvSpPr>
+          <p:nvPr>
+            <p:ph type="dt" sz="half" idx="10"/>
+          </p:nvPr>
+        </p:nvSpPr>
+        <p:spPr/>
+        <p:txBody>
+          <a:bodyPr/>
+          <a:lstStyle/>
+          <a:p>
+            <a:fld id="{5BCAD085-E8A6-8845-BD4E-CB4CCA059FC4}" type="datetimeFigureOut">
+              <a:rPr lang="en-US" smtClean="0"/>
+              <a:t>1/27/13</a:t>
+            </a:fld>
+            <a:endParaRPr lang="en-US"/>
+          </a:p>
+        </p:txBody>
+      </p:sp>
+      <p:sp>
+        <p:nvSpPr>
+          <p:cNvPr id="4" name="Footer Placeholder 3"/>
+          <p:cNvSpPr>
+            <a:spLocks noGrp="1"/>
+          </p:cNvSpPr>
+          <p:nvPr>
+            <p:ph type="ftr" sz="quarter" idx="11"/>
+          </p:nvPr>
+        </p:nvSpPr>
+        <p:spPr/>
+        <p:txBody>
+          <a:bodyPr/>
+          <a:lstStyle/>
+          <a:p>
+            <a:endParaRPr lang="en-US"/>
+          </a:p>
+        </p:txBody>
+      </p:sp>
+      <p:sp>
+        <p:nvSpPr>
+          <p:cNvPr id="5" name="Slide Number Placeholder 4"/>
+          <p:cNvSpPr>
+            <a:spLocks noGrp="1"/>
+          </p:cNvSpPr>
+          <p:nvPr>
+            <p:ph type="sldNum" sz="quarter" idx="12"/>
+          </p:nvPr>
+        </p:nvSpPr>
+        <p:spPr/>
+        <p:txBody>
+          <a:bodyPr/>
+          <a:lstStyle/>
+          <a:p>
+            <a:fld id="{C1FF6DA9-008F-8B48-92A6-B652298478BF}" type="slidenum">
+              <a:rPr lang="en-US" smtClean="0"/>
+              <a:t>‹#›</a:t>
+            </a:fld>
             <a:endParaRPr lang="en-US"/>
           </a:p>
         </p:txBody>
       </p:sp>
     </p:spTree>
+    <p:extLst>
+      <p:ext uri="{BB962C8B-B14F-4D97-AF65-F5344CB8AC3E}">
+        <p14:creationId xmlns:p14="http://schemas.microsoft.com/office/powerpoint/2010/main" val="727027711"/>
+      </p:ext>
+    </p:extLst>
   </p:cSld>
+  <p:clrMapOvr>
+    <a:masterClrMapping/>
+  </p:clrMapOvr>
 </p:sldLayout>
 </file>
 
 <file path=ppt/slideLayouts/slideLayout7.xml><?xml version="1.0" encoding="utf-8"?>
-<p:sldLayout xmlns:a="http://schemas.openxmlformats.org/drawingml/2006/main" xmlns:p="http://schemas.openxmlformats.org/presentationml/2006/main" type="blank" preserve="1">
+<p:sldLayout xmlns:a="http://schemas.openxmlformats.org/drawingml/2006/main" xmlns:r="http://schemas.openxmlformats.org/officeDocument/2006/relationships" xmlns:p="http://schemas.openxmlformats.org/presentationml/2006/main" type="blank" preserve="1">
   <p:cSld name="Blank">
     <p:spTree>
       <p:nvGrpSpPr>
@@ -622,13 +1965,86 @@
           <a:chExt cx="0" cy="0"/>
         </a:xfrm>
       </p:grpSpPr>
+      <p:sp>
+        <p:nvSpPr>
+          <p:cNvPr id="2" name="Date Placeholder 1"/>
+          <p:cNvSpPr>
+            <a:spLocks noGrp="1"/>
+          </p:cNvSpPr>
+          <p:nvPr>
+            <p:ph type="dt" sz="half" idx="10"/>
+          </p:nvPr>
+        </p:nvSpPr>
+        <p:spPr/>
+        <p:txBody>
+          <a:bodyPr/>
+          <a:lstStyle/>
+          <a:p>
+            <a:fld id="{5BCAD085-E8A6-8845-BD4E-CB4CCA059FC4}" type="datetimeFigureOut">
+              <a:rPr lang="en-US" smtClean="0"/>
+              <a:t>1/27/13</a:t>
+            </a:fld>
+            <a:endParaRPr lang="en-US"/>
+          </a:p>
+        </p:txBody>
+      </p:sp>
+      <p:sp>
+        <p:nvSpPr>
+          <p:cNvPr id="3" name="Footer Placeholder 2"/>
+          <p:cNvSpPr>
+            <a:spLocks noGrp="1"/>
+          </p:cNvSpPr>
+          <p:nvPr>
+            <p:ph type="ftr" sz="quarter" idx="11"/>
+          </p:nvPr>
+        </p:nvSpPr>
+        <p:spPr/>
+        <p:txBody>
+          <a:bodyPr/>
+          <a:lstStyle/>
+          <a:p>
+            <a:endParaRPr lang="en-US"/>
+          </a:p>
+        </p:txBody>
+      </p:sp>
+      <p:sp>
+        <p:nvSpPr>
+          <p:cNvPr id="4" name="Slide Number Placeholder 3"/>
+          <p:cNvSpPr>
+            <a:spLocks noGrp="1"/>
+          </p:cNvSpPr>
+          <p:nvPr>
+            <p:ph type="sldNum" sz="quarter" idx="12"/>
+          </p:nvPr>
+        </p:nvSpPr>
+        <p:spPr/>
+        <p:txBody>
+          <a:bodyPr/>
+          <a:lstStyle/>
+          <a:p>
+            <a:fld id="{C1FF6DA9-008F-8B48-92A6-B652298478BF}" type="slidenum">
+              <a:rPr lang="en-US" smtClean="0"/>
+              <a:t>‹#›</a:t>
+            </a:fld>
+            <a:endParaRPr lang="en-US"/>
+          </a:p>
+        </p:txBody>
+      </p:sp>
     </p:spTree>
+    <p:extLst>
+      <p:ext uri="{BB962C8B-B14F-4D97-AF65-F5344CB8AC3E}">
+        <p14:creationId xmlns:p14="http://schemas.microsoft.com/office/powerpoint/2010/main" val="1212999818"/>
+      </p:ext>
+    </p:extLst>
   </p:cSld>
+  <p:clrMapOvr>
+    <a:masterClrMapping/>
+  </p:clrMapOvr>
 </p:sldLayout>
 </file>
 
 <file path=ppt/slideLayouts/slideLayout8.xml><?xml version="1.0" encoding="utf-8"?>
-<p:sldLayout xmlns:a="http://schemas.openxmlformats.org/drawingml/2006/main" xmlns:p="http://schemas.openxmlformats.org/presentationml/2006/main" type="objTx" preserve="1">
+<p:sldLayout xmlns:a="http://schemas.openxmlformats.org/drawingml/2006/main" xmlns:r="http://schemas.openxmlformats.org/officeDocument/2006/relationships" xmlns:p="http://schemas.openxmlformats.org/presentationml/2006/main" type="objTx" preserve="1">
   <p:cSld name="Content with Caption">
     <p:spTree>
       <p:nvGrpSpPr>
@@ -654,11 +2070,24 @@
             <p:ph type="title"/>
           </p:nvPr>
         </p:nvSpPr>
-        <p:spPr/>
-        <p:txBody>
-          <a:bodyPr/>
-          <a:lstStyle/>
-          <a:p>
+        <p:spPr>
+          <a:xfrm>
+            <a:off x="457200" y="273050"/>
+            <a:ext cx="3008313" cy="1162050"/>
+          </a:xfrm>
+        </p:spPr>
+        <p:txBody>
+          <a:bodyPr anchor="b"/>
+          <a:lstStyle>
+            <a:lvl1pPr algn="l">
+              <a:defRPr sz="2000" b="1"/>
+            </a:lvl1pPr>
+          </a:lstStyle>
+          <a:p>
+            <a:r>
+              <a:rPr lang="en-US" smtClean="0"/>
+              <a:t>Click to edit Master title style</a:t>
+            </a:r>
             <a:endParaRPr lang="en-US"/>
           </a:p>
         </p:txBody>
@@ -670,25 +2099,229 @@
             <a:spLocks noGrp="1"/>
           </p:cNvSpPr>
           <p:nvPr>
-            <p:ph type="body" idx="1"/>
-          </p:nvPr>
-        </p:nvSpPr>
-        <p:spPr/>
-        <p:txBody>
-          <a:bodyPr/>
-          <a:lstStyle/>
-          <a:p>
+            <p:ph idx="1"/>
+          </p:nvPr>
+        </p:nvSpPr>
+        <p:spPr>
+          <a:xfrm>
+            <a:off x="3575050" y="273050"/>
+            <a:ext cx="5111750" cy="5853113"/>
+          </a:xfrm>
+        </p:spPr>
+        <p:txBody>
+          <a:bodyPr/>
+          <a:lstStyle>
+            <a:lvl1pPr>
+              <a:defRPr sz="3200"/>
+            </a:lvl1pPr>
+            <a:lvl2pPr>
+              <a:defRPr sz="2800"/>
+            </a:lvl2pPr>
+            <a:lvl3pPr>
+              <a:defRPr sz="2400"/>
+            </a:lvl3pPr>
+            <a:lvl4pPr>
+              <a:defRPr sz="2000"/>
+            </a:lvl4pPr>
+            <a:lvl5pPr>
+              <a:defRPr sz="2000"/>
+            </a:lvl5pPr>
+            <a:lvl6pPr>
+              <a:defRPr sz="2000"/>
+            </a:lvl6pPr>
+            <a:lvl7pPr>
+              <a:defRPr sz="2000"/>
+            </a:lvl7pPr>
+            <a:lvl8pPr>
+              <a:defRPr sz="2000"/>
+            </a:lvl8pPr>
+            <a:lvl9pPr>
+              <a:defRPr sz="2000"/>
+            </a:lvl9pPr>
+          </a:lstStyle>
+          <a:p>
+            <a:pPr lvl="0"/>
+            <a:r>
+              <a:rPr lang="en-US" smtClean="0"/>
+              <a:t>Click to edit Master text styles</a:t>
+            </a:r>
+          </a:p>
+          <a:p>
+            <a:pPr lvl="1"/>
+            <a:r>
+              <a:rPr lang="en-US" smtClean="0"/>
+              <a:t>Second level</a:t>
+            </a:r>
+          </a:p>
+          <a:p>
+            <a:pPr lvl="2"/>
+            <a:r>
+              <a:rPr lang="en-US" smtClean="0"/>
+              <a:t>Third level</a:t>
+            </a:r>
+          </a:p>
+          <a:p>
+            <a:pPr lvl="3"/>
+            <a:r>
+              <a:rPr lang="en-US" smtClean="0"/>
+              <a:t>Fourth level</a:t>
+            </a:r>
+          </a:p>
+          <a:p>
+            <a:pPr lvl="4"/>
+            <a:r>
+              <a:rPr lang="en-US" smtClean="0"/>
+              <a:t>Fifth level</a:t>
+            </a:r>
+            <a:endParaRPr lang="en-US"/>
+          </a:p>
+        </p:txBody>
+      </p:sp>
+      <p:sp>
+        <p:nvSpPr>
+          <p:cNvPr id="4" name="Text Placeholder 3"/>
+          <p:cNvSpPr>
+            <a:spLocks noGrp="1"/>
+          </p:cNvSpPr>
+          <p:nvPr>
+            <p:ph type="body" sz="half" idx="2"/>
+          </p:nvPr>
+        </p:nvSpPr>
+        <p:spPr>
+          <a:xfrm>
+            <a:off x="457200" y="1435100"/>
+            <a:ext cx="3008313" cy="4691063"/>
+          </a:xfrm>
+        </p:spPr>
+        <p:txBody>
+          <a:bodyPr/>
+          <a:lstStyle>
+            <a:lvl1pPr marL="0" indent="0">
+              <a:buNone/>
+              <a:defRPr sz="1400"/>
+            </a:lvl1pPr>
+            <a:lvl2pPr marL="457200" indent="0">
+              <a:buNone/>
+              <a:defRPr sz="1200"/>
+            </a:lvl2pPr>
+            <a:lvl3pPr marL="914400" indent="0">
+              <a:buNone/>
+              <a:defRPr sz="1000"/>
+            </a:lvl3pPr>
+            <a:lvl4pPr marL="1371600" indent="0">
+              <a:buNone/>
+              <a:defRPr sz="900"/>
+            </a:lvl4pPr>
+            <a:lvl5pPr marL="1828800" indent="0">
+              <a:buNone/>
+              <a:defRPr sz="900"/>
+            </a:lvl5pPr>
+            <a:lvl6pPr marL="2286000" indent="0">
+              <a:buNone/>
+              <a:defRPr sz="900"/>
+            </a:lvl6pPr>
+            <a:lvl7pPr marL="2743200" indent="0">
+              <a:buNone/>
+              <a:defRPr sz="900"/>
+            </a:lvl7pPr>
+            <a:lvl8pPr marL="3200400" indent="0">
+              <a:buNone/>
+              <a:defRPr sz="900"/>
+            </a:lvl8pPr>
+            <a:lvl9pPr marL="3657600" indent="0">
+              <a:buNone/>
+              <a:defRPr sz="900"/>
+            </a:lvl9pPr>
+          </a:lstStyle>
+          <a:p>
+            <a:pPr lvl="0"/>
+            <a:r>
+              <a:rPr lang="en-US" smtClean="0"/>
+              <a:t>Click to edit Master text styles</a:t>
+            </a:r>
+          </a:p>
+        </p:txBody>
+      </p:sp>
+      <p:sp>
+        <p:nvSpPr>
+          <p:cNvPr id="5" name="Date Placeholder 4"/>
+          <p:cNvSpPr>
+            <a:spLocks noGrp="1"/>
+          </p:cNvSpPr>
+          <p:nvPr>
+            <p:ph type="dt" sz="half" idx="10"/>
+          </p:nvPr>
+        </p:nvSpPr>
+        <p:spPr/>
+        <p:txBody>
+          <a:bodyPr/>
+          <a:lstStyle/>
+          <a:p>
+            <a:fld id="{5BCAD085-E8A6-8845-BD4E-CB4CCA059FC4}" type="datetimeFigureOut">
+              <a:rPr lang="en-US" smtClean="0"/>
+              <a:t>1/27/13</a:t>
+            </a:fld>
+            <a:endParaRPr lang="en-US"/>
+          </a:p>
+        </p:txBody>
+      </p:sp>
+      <p:sp>
+        <p:nvSpPr>
+          <p:cNvPr id="6" name="Footer Placeholder 5"/>
+          <p:cNvSpPr>
+            <a:spLocks noGrp="1"/>
+          </p:cNvSpPr>
+          <p:nvPr>
+            <p:ph type="ftr" sz="quarter" idx="11"/>
+          </p:nvPr>
+        </p:nvSpPr>
+        <p:spPr/>
+        <p:txBody>
+          <a:bodyPr/>
+          <a:lstStyle/>
+          <a:p>
+            <a:endParaRPr lang="en-US"/>
+          </a:p>
+        </p:txBody>
+      </p:sp>
+      <p:sp>
+        <p:nvSpPr>
+          <p:cNvPr id="7" name="Slide Number Placeholder 6"/>
+          <p:cNvSpPr>
+            <a:spLocks noGrp="1"/>
+          </p:cNvSpPr>
+          <p:nvPr>
+            <p:ph type="sldNum" sz="quarter" idx="12"/>
+          </p:nvPr>
+        </p:nvSpPr>
+        <p:spPr/>
+        <p:txBody>
+          <a:bodyPr/>
+          <a:lstStyle/>
+          <a:p>
+            <a:fld id="{C1FF6DA9-008F-8B48-92A6-B652298478BF}" type="slidenum">
+              <a:rPr lang="en-US" smtClean="0"/>
+              <a:t>‹#›</a:t>
+            </a:fld>
             <a:endParaRPr lang="en-US"/>
           </a:p>
         </p:txBody>
       </p:sp>
     </p:spTree>
+    <p:extLst>
+      <p:ext uri="{BB962C8B-B14F-4D97-AF65-F5344CB8AC3E}">
+        <p14:creationId xmlns:p14="http://schemas.microsoft.com/office/powerpoint/2010/main" val="1840726560"/>
+      </p:ext>
+    </p:extLst>
   </p:cSld>
+  <p:clrMapOvr>
+    <a:masterClrMapping/>
+  </p:clrMapOvr>
 </p:sldLayout>
 </file>
 
 <file path=ppt/slideLayouts/slideLayout9.xml><?xml version="1.0" encoding="utf-8"?>
-<p:sldLayout xmlns:a="http://schemas.openxmlformats.org/drawingml/2006/main" xmlns:p="http://schemas.openxmlformats.org/presentationml/2006/main" type="picTx" preserve="1">
+<p:sldLayout xmlns:a="http://schemas.openxmlformats.org/drawingml/2006/main" xmlns:r="http://schemas.openxmlformats.org/officeDocument/2006/relationships" xmlns:p="http://schemas.openxmlformats.org/presentationml/2006/main" type="picTx" preserve="1">
   <p:cSld name="Picture with Caption">
     <p:spTree>
       <p:nvGrpSpPr>
@@ -714,41 +2347,234 @@
             <p:ph type="title"/>
           </p:nvPr>
         </p:nvSpPr>
-        <p:spPr/>
-        <p:txBody>
-          <a:bodyPr/>
-          <a:lstStyle/>
-          <a:p>
-            <a:endParaRPr lang="en-US"/>
-          </a:p>
-        </p:txBody>
-      </p:sp>
-      <p:sp>
-        <p:nvSpPr>
-          <p:cNvPr id="3" name="Content Placeholder 2"/>
-          <p:cNvSpPr>
-            <a:spLocks noGrp="1"/>
-          </p:cNvSpPr>
-          <p:nvPr>
-            <p:ph type="body" idx="1"/>
-          </p:nvPr>
-        </p:nvSpPr>
-        <p:spPr/>
-        <p:txBody>
-          <a:bodyPr/>
-          <a:lstStyle/>
-          <a:p>
+        <p:spPr>
+          <a:xfrm>
+            <a:off x="1792288" y="4800600"/>
+            <a:ext cx="5486400" cy="566738"/>
+          </a:xfrm>
+        </p:spPr>
+        <p:txBody>
+          <a:bodyPr anchor="b"/>
+          <a:lstStyle>
+            <a:lvl1pPr algn="l">
+              <a:defRPr sz="2000" b="1"/>
+            </a:lvl1pPr>
+          </a:lstStyle>
+          <a:p>
+            <a:r>
+              <a:rPr lang="en-US" smtClean="0"/>
+              <a:t>Click to edit Master title style</a:t>
+            </a:r>
+            <a:endParaRPr lang="en-US"/>
+          </a:p>
+        </p:txBody>
+      </p:sp>
+      <p:sp>
+        <p:nvSpPr>
+          <p:cNvPr id="3" name="Picture Placeholder 2"/>
+          <p:cNvSpPr>
+            <a:spLocks noGrp="1"/>
+          </p:cNvSpPr>
+          <p:nvPr>
+            <p:ph type="pic" idx="1"/>
+          </p:nvPr>
+        </p:nvSpPr>
+        <p:spPr>
+          <a:xfrm>
+            <a:off x="1792288" y="612775"/>
+            <a:ext cx="5486400" cy="4114800"/>
+          </a:xfrm>
+        </p:spPr>
+        <p:txBody>
+          <a:bodyPr/>
+          <a:lstStyle>
+            <a:lvl1pPr marL="0" indent="0">
+              <a:buNone/>
+              <a:defRPr sz="3200"/>
+            </a:lvl1pPr>
+            <a:lvl2pPr marL="457200" indent="0">
+              <a:buNone/>
+              <a:defRPr sz="2800"/>
+            </a:lvl2pPr>
+            <a:lvl3pPr marL="914400" indent="0">
+              <a:buNone/>
+              <a:defRPr sz="2400"/>
+            </a:lvl3pPr>
+            <a:lvl4pPr marL="1371600" indent="0">
+              <a:buNone/>
+              <a:defRPr sz="2000"/>
+            </a:lvl4pPr>
+            <a:lvl5pPr marL="1828800" indent="0">
+              <a:buNone/>
+              <a:defRPr sz="2000"/>
+            </a:lvl5pPr>
+            <a:lvl6pPr marL="2286000" indent="0">
+              <a:buNone/>
+              <a:defRPr sz="2000"/>
+            </a:lvl6pPr>
+            <a:lvl7pPr marL="2743200" indent="0">
+              <a:buNone/>
+              <a:defRPr sz="2000"/>
+            </a:lvl7pPr>
+            <a:lvl8pPr marL="3200400" indent="0">
+              <a:buNone/>
+              <a:defRPr sz="2000"/>
+            </a:lvl8pPr>
+            <a:lvl9pPr marL="3657600" indent="0">
+              <a:buNone/>
+              <a:defRPr sz="2000"/>
+            </a:lvl9pPr>
+          </a:lstStyle>
+          <a:p>
+            <a:endParaRPr lang="en-US"/>
+          </a:p>
+        </p:txBody>
+      </p:sp>
+      <p:sp>
+        <p:nvSpPr>
+          <p:cNvPr id="4" name="Text Placeholder 3"/>
+          <p:cNvSpPr>
+            <a:spLocks noGrp="1"/>
+          </p:cNvSpPr>
+          <p:nvPr>
+            <p:ph type="body" sz="half" idx="2"/>
+          </p:nvPr>
+        </p:nvSpPr>
+        <p:spPr>
+          <a:xfrm>
+            <a:off x="1792288" y="5367338"/>
+            <a:ext cx="5486400" cy="804862"/>
+          </a:xfrm>
+        </p:spPr>
+        <p:txBody>
+          <a:bodyPr/>
+          <a:lstStyle>
+            <a:lvl1pPr marL="0" indent="0">
+              <a:buNone/>
+              <a:defRPr sz="1400"/>
+            </a:lvl1pPr>
+            <a:lvl2pPr marL="457200" indent="0">
+              <a:buNone/>
+              <a:defRPr sz="1200"/>
+            </a:lvl2pPr>
+            <a:lvl3pPr marL="914400" indent="0">
+              <a:buNone/>
+              <a:defRPr sz="1000"/>
+            </a:lvl3pPr>
+            <a:lvl4pPr marL="1371600" indent="0">
+              <a:buNone/>
+              <a:defRPr sz="900"/>
+            </a:lvl4pPr>
+            <a:lvl5pPr marL="1828800" indent="0">
+              <a:buNone/>
+              <a:defRPr sz="900"/>
+            </a:lvl5pPr>
+            <a:lvl6pPr marL="2286000" indent="0">
+              <a:buNone/>
+              <a:defRPr sz="900"/>
+            </a:lvl6pPr>
+            <a:lvl7pPr marL="2743200" indent="0">
+              <a:buNone/>
+              <a:defRPr sz="900"/>
+            </a:lvl7pPr>
+            <a:lvl8pPr marL="3200400" indent="0">
+              <a:buNone/>
+              <a:defRPr sz="900"/>
+            </a:lvl8pPr>
+            <a:lvl9pPr marL="3657600" indent="0">
+              <a:buNone/>
+              <a:defRPr sz="900"/>
+            </a:lvl9pPr>
+          </a:lstStyle>
+          <a:p>
+            <a:pPr lvl="0"/>
+            <a:r>
+              <a:rPr lang="en-US" smtClean="0"/>
+              <a:t>Click to edit Master text styles</a:t>
+            </a:r>
+          </a:p>
+        </p:txBody>
+      </p:sp>
+      <p:sp>
+        <p:nvSpPr>
+          <p:cNvPr id="5" name="Date Placeholder 4"/>
+          <p:cNvSpPr>
+            <a:spLocks noGrp="1"/>
+          </p:cNvSpPr>
+          <p:nvPr>
+            <p:ph type="dt" sz="half" idx="10"/>
+          </p:nvPr>
+        </p:nvSpPr>
+        <p:spPr/>
+        <p:txBody>
+          <a:bodyPr/>
+          <a:lstStyle/>
+          <a:p>
+            <a:fld id="{5BCAD085-E8A6-8845-BD4E-CB4CCA059FC4}" type="datetimeFigureOut">
+              <a:rPr lang="en-US" smtClean="0"/>
+              <a:t>1/27/13</a:t>
+            </a:fld>
+            <a:endParaRPr lang="en-US"/>
+          </a:p>
+        </p:txBody>
+      </p:sp>
+      <p:sp>
+        <p:nvSpPr>
+          <p:cNvPr id="6" name="Footer Placeholder 5"/>
+          <p:cNvSpPr>
+            <a:spLocks noGrp="1"/>
+          </p:cNvSpPr>
+          <p:nvPr>
+            <p:ph type="ftr" sz="quarter" idx="11"/>
+          </p:nvPr>
+        </p:nvSpPr>
+        <p:spPr/>
+        <p:txBody>
+          <a:bodyPr/>
+          <a:lstStyle/>
+          <a:p>
+            <a:endParaRPr lang="en-US"/>
+          </a:p>
+        </p:txBody>
+      </p:sp>
+      <p:sp>
+        <p:nvSpPr>
+          <p:cNvPr id="7" name="Slide Number Placeholder 6"/>
+          <p:cNvSpPr>
+            <a:spLocks noGrp="1"/>
+          </p:cNvSpPr>
+          <p:nvPr>
+            <p:ph type="sldNum" sz="quarter" idx="12"/>
+          </p:nvPr>
+        </p:nvSpPr>
+        <p:spPr/>
+        <p:txBody>
+          <a:bodyPr/>
+          <a:lstStyle/>
+          <a:p>
+            <a:fld id="{C1FF6DA9-008F-8B48-92A6-B652298478BF}" type="slidenum">
+              <a:rPr lang="en-US" smtClean="0"/>
+              <a:t>‹#›</a:t>
+            </a:fld>
             <a:endParaRPr lang="en-US"/>
           </a:p>
         </p:txBody>
       </p:sp>
     </p:spTree>
+    <p:extLst>
+      <p:ext uri="{BB962C8B-B14F-4D97-AF65-F5344CB8AC3E}">
+        <p14:creationId xmlns:p14="http://schemas.microsoft.com/office/powerpoint/2010/main" val="3889236939"/>
+      </p:ext>
+    </p:extLst>
   </p:cSld>
+  <p:clrMapOvr>
+    <a:masterClrMapping/>
+  </p:clrMapOvr>
 </p:sldLayout>
 </file>
 
 <file path=ppt/slideMasters/slideMaster1.xml><?xml version="1.0" encoding="utf-8"?>
-<p:sldMaster xmlns:a="http://schemas.openxmlformats.org/drawingml/2006/main" xmlns:p="http://schemas.openxmlformats.org/presentationml/2006/main" xmlns:r="http://schemas.openxmlformats.org/officeDocument/2006/relationships">
+<p:sldMaster xmlns:a="http://schemas.openxmlformats.org/drawingml/2006/main" xmlns:r="http://schemas.openxmlformats.org/officeDocument/2006/relationships" xmlns:p="http://schemas.openxmlformats.org/presentationml/2006/main">
   <p:cSld>
     <p:bg>
       <p:bgRef idx="1001">
@@ -769,44 +2595,496 @@
           <a:chExt cx="0" cy="0"/>
         </a:xfrm>
       </p:grpSpPr>
+      <p:sp>
+        <p:nvSpPr>
+          <p:cNvPr id="2" name="Title Placeholder 1"/>
+          <p:cNvSpPr>
+            <a:spLocks noGrp="1"/>
+          </p:cNvSpPr>
+          <p:nvPr>
+            <p:ph type="title"/>
+          </p:nvPr>
+        </p:nvSpPr>
+        <p:spPr>
+          <a:xfrm>
+            <a:off x="457200" y="274638"/>
+            <a:ext cx="8229600" cy="1143000"/>
+          </a:xfrm>
+          <a:prstGeom prst="rect">
+            <a:avLst/>
+          </a:prstGeom>
+        </p:spPr>
+        <p:txBody>
+          <a:bodyPr vert="horz" lIns="91440" tIns="45720" rIns="91440" bIns="45720" rtlCol="0" anchor="ctr">
+            <a:normAutofit/>
+          </a:bodyPr>
+          <a:lstStyle/>
+          <a:p>
+            <a:r>
+              <a:rPr lang="en-US" smtClean="0"/>
+              <a:t>Click to edit Master title style</a:t>
+            </a:r>
+            <a:endParaRPr lang="en-US"/>
+          </a:p>
+        </p:txBody>
+      </p:sp>
+      <p:sp>
+        <p:nvSpPr>
+          <p:cNvPr id="3" name="Text Placeholder 2"/>
+          <p:cNvSpPr>
+            <a:spLocks noGrp="1"/>
+          </p:cNvSpPr>
+          <p:nvPr>
+            <p:ph type="body" idx="1"/>
+          </p:nvPr>
+        </p:nvSpPr>
+        <p:spPr>
+          <a:xfrm>
+            <a:off x="457200" y="1600200"/>
+            <a:ext cx="8229600" cy="4525963"/>
+          </a:xfrm>
+          <a:prstGeom prst="rect">
+            <a:avLst/>
+          </a:prstGeom>
+        </p:spPr>
+        <p:txBody>
+          <a:bodyPr vert="horz" lIns="91440" tIns="45720" rIns="91440" bIns="45720" rtlCol="0">
+            <a:normAutofit/>
+          </a:bodyPr>
+          <a:lstStyle/>
+          <a:p>
+            <a:pPr lvl="0"/>
+            <a:r>
+              <a:rPr lang="en-US" smtClean="0"/>
+              <a:t>Click to edit Master text styles</a:t>
+            </a:r>
+          </a:p>
+          <a:p>
+            <a:pPr lvl="1"/>
+            <a:r>
+              <a:rPr lang="en-US" smtClean="0"/>
+              <a:t>Second level</a:t>
+            </a:r>
+          </a:p>
+          <a:p>
+            <a:pPr lvl="2"/>
+            <a:r>
+              <a:rPr lang="en-US" smtClean="0"/>
+              <a:t>Third level</a:t>
+            </a:r>
+          </a:p>
+          <a:p>
+            <a:pPr lvl="3"/>
+            <a:r>
+              <a:rPr lang="en-US" smtClean="0"/>
+              <a:t>Fourth level</a:t>
+            </a:r>
+          </a:p>
+          <a:p>
+            <a:pPr lvl="4"/>
+            <a:r>
+              <a:rPr lang="en-US" smtClean="0"/>
+              <a:t>Fifth level</a:t>
+            </a:r>
+            <a:endParaRPr lang="en-US"/>
+          </a:p>
+        </p:txBody>
+      </p:sp>
+      <p:sp>
+        <p:nvSpPr>
+          <p:cNvPr id="4" name="Date Placeholder 3"/>
+          <p:cNvSpPr>
+            <a:spLocks noGrp="1"/>
+          </p:cNvSpPr>
+          <p:nvPr>
+            <p:ph type="dt" sz="half" idx="2"/>
+          </p:nvPr>
+        </p:nvSpPr>
+        <p:spPr>
+          <a:xfrm>
+            <a:off x="457200" y="6356350"/>
+            <a:ext cx="2133600" cy="365125"/>
+          </a:xfrm>
+          <a:prstGeom prst="rect">
+            <a:avLst/>
+          </a:prstGeom>
+        </p:spPr>
+        <p:txBody>
+          <a:bodyPr vert="horz" lIns="91440" tIns="45720" rIns="91440" bIns="45720" rtlCol="0" anchor="ctr"/>
+          <a:lstStyle>
+            <a:lvl1pPr algn="l">
+              <a:defRPr sz="1200">
+                <a:solidFill>
+                  <a:schemeClr val="tx1">
+                    <a:tint val="75000"/>
+                  </a:schemeClr>
+                </a:solidFill>
+              </a:defRPr>
+            </a:lvl1pPr>
+          </a:lstStyle>
+          <a:p>
+            <a:fld id="{5BCAD085-E8A6-8845-BD4E-CB4CCA059FC4}" type="datetimeFigureOut">
+              <a:rPr lang="en-US" smtClean="0"/>
+              <a:t>1/27/13</a:t>
+            </a:fld>
+            <a:endParaRPr lang="en-US"/>
+          </a:p>
+        </p:txBody>
+      </p:sp>
+      <p:sp>
+        <p:nvSpPr>
+          <p:cNvPr id="5" name="Footer Placeholder 4"/>
+          <p:cNvSpPr>
+            <a:spLocks noGrp="1"/>
+          </p:cNvSpPr>
+          <p:nvPr>
+            <p:ph type="ftr" sz="quarter" idx="3"/>
+          </p:nvPr>
+        </p:nvSpPr>
+        <p:spPr>
+          <a:xfrm>
+            <a:off x="3124200" y="6356350"/>
+            <a:ext cx="2895600" cy="365125"/>
+          </a:xfrm>
+          <a:prstGeom prst="rect">
+            <a:avLst/>
+          </a:prstGeom>
+        </p:spPr>
+        <p:txBody>
+          <a:bodyPr vert="horz" lIns="91440" tIns="45720" rIns="91440" bIns="45720" rtlCol="0" anchor="ctr"/>
+          <a:lstStyle>
+            <a:lvl1pPr algn="ctr">
+              <a:defRPr sz="1200">
+                <a:solidFill>
+                  <a:schemeClr val="tx1">
+                    <a:tint val="75000"/>
+                  </a:schemeClr>
+                </a:solidFill>
+              </a:defRPr>
+            </a:lvl1pPr>
+          </a:lstStyle>
+          <a:p>
+            <a:endParaRPr lang="en-US"/>
+          </a:p>
+        </p:txBody>
+      </p:sp>
+      <p:sp>
+        <p:nvSpPr>
+          <p:cNvPr id="6" name="Slide Number Placeholder 5"/>
+          <p:cNvSpPr>
+            <a:spLocks noGrp="1"/>
+          </p:cNvSpPr>
+          <p:nvPr>
+            <p:ph type="sldNum" sz="quarter" idx="4"/>
+          </p:nvPr>
+        </p:nvSpPr>
+        <p:spPr>
+          <a:xfrm>
+            <a:off x="6553200" y="6356350"/>
+            <a:ext cx="2133600" cy="365125"/>
+          </a:xfrm>
+          <a:prstGeom prst="rect">
+            <a:avLst/>
+          </a:prstGeom>
+        </p:spPr>
+        <p:txBody>
+          <a:bodyPr vert="horz" lIns="91440" tIns="45720" rIns="91440" bIns="45720" rtlCol="0" anchor="ctr"/>
+          <a:lstStyle>
+            <a:lvl1pPr algn="r">
+              <a:defRPr sz="1200">
+                <a:solidFill>
+                  <a:schemeClr val="tx1">
+                    <a:tint val="75000"/>
+                  </a:schemeClr>
+                </a:solidFill>
+              </a:defRPr>
+            </a:lvl1pPr>
+          </a:lstStyle>
+          <a:p>
+            <a:fld id="{C1FF6DA9-008F-8B48-92A6-B652298478BF}" type="slidenum">
+              <a:rPr lang="en-US" smtClean="0"/>
+              <a:t>‹#›</a:t>
+            </a:fld>
+            <a:endParaRPr lang="en-US"/>
+          </a:p>
+        </p:txBody>
+      </p:sp>
     </p:spTree>
+    <p:extLst>
+      <p:ext uri="{BB962C8B-B14F-4D97-AF65-F5344CB8AC3E}">
+        <p14:creationId xmlns:p14="http://schemas.microsoft.com/office/powerpoint/2010/main" val="2209977519"/>
+      </p:ext>
+    </p:extLst>
   </p:cSld>
   <p:clrMap bg1="lt1" tx1="dk1" bg2="lt2" tx2="dk2" accent1="accent1" accent2="accent2" accent3="accent3" accent4="accent4" accent5="accent5" accent6="accent6" hlink="hlink" folHlink="folHlink"/>
   <p:sldLayoutIdLst>
-    <p:sldLayoutId r:id="rId1" id="2147483649"/>
-    <p:sldLayoutId r:id="rId2" id="2147483650"/>
-    <p:sldLayoutId r:id="rId3" id="2147483651"/>
-    <p:sldLayoutId r:id="rId4" id="2147483652"/>
-    <p:sldLayoutId r:id="rId5" id="2147483653"/>
-    <p:sldLayoutId r:id="rId6" id="2147483654"/>
-    <p:sldLayoutId r:id="rId7" id="2147483655"/>
-    <p:sldLayoutId r:id="rId8" id="2147483656"/>
-    <p:sldLayoutId r:id="rId9" id="2147483657"/>
-    <p:sldLayoutId r:id="rId10" id="2147483658"/>
-    <p:sldLayoutId r:id="rId11" id="2147483659"/>
+    <p:sldLayoutId id="2147483649" r:id="rId1"/>
+    <p:sldLayoutId id="2147483650" r:id="rId2"/>
+    <p:sldLayoutId id="2147483651" r:id="rId3"/>
+    <p:sldLayoutId id="2147483652" r:id="rId4"/>
+    <p:sldLayoutId id="2147483653" r:id="rId5"/>
+    <p:sldLayoutId id="2147483654" r:id="rId6"/>
+    <p:sldLayoutId id="2147483655" r:id="rId7"/>
+    <p:sldLayoutId id="2147483656" r:id="rId8"/>
+    <p:sldLayoutId id="2147483657" r:id="rId9"/>
+    <p:sldLayoutId id="2147483658" r:id="rId10"/>
+    <p:sldLayoutId id="2147483659" r:id="rId11"/>
   </p:sldLayoutIdLst>
   <p:txStyles>
     <p:titleStyle>
-      <a:lvl1pPr>
-        <a:defRPr/>
+      <a:lvl1pPr algn="ctr" defTabSz="457200" rtl="0" eaLnBrk="1" latinLnBrk="0" hangingPunct="1">
+        <a:spcBef>
+          <a:spcPct val="0"/>
+        </a:spcBef>
+        <a:buNone/>
+        <a:defRPr sz="4400" kern="1200">
+          <a:solidFill>
+            <a:schemeClr val="tx1"/>
+          </a:solidFill>
+          <a:latin typeface="+mj-lt"/>
+          <a:ea typeface="+mj-ea"/>
+          <a:cs typeface="+mj-cs"/>
+        </a:defRPr>
       </a:lvl1pPr>
     </p:titleStyle>
     <p:bodyStyle>
-      <a:lvl1pPr>
-        <a:defRPr/>
+      <a:lvl1pPr marL="342900" indent="-342900" algn="l" defTabSz="457200" rtl="0" eaLnBrk="1" latinLnBrk="0" hangingPunct="1">
+        <a:spcBef>
+          <a:spcPct val="20000"/>
+        </a:spcBef>
+        <a:buFont typeface="Arial"/>
+        <a:buChar char="•"/>
+        <a:defRPr sz="3200" kern="1200">
+          <a:solidFill>
+            <a:schemeClr val="tx1"/>
+          </a:solidFill>
+          <a:latin typeface="+mn-lt"/>
+          <a:ea typeface="+mn-ea"/>
+          <a:cs typeface="+mn-cs"/>
+        </a:defRPr>
       </a:lvl1pPr>
+      <a:lvl2pPr marL="742950" indent="-285750" algn="l" defTabSz="457200" rtl="0" eaLnBrk="1" latinLnBrk="0" hangingPunct="1">
+        <a:spcBef>
+          <a:spcPct val="20000"/>
+        </a:spcBef>
+        <a:buFont typeface="Arial"/>
+        <a:buChar char="–"/>
+        <a:defRPr sz="2800" kern="1200">
+          <a:solidFill>
+            <a:schemeClr val="tx1"/>
+          </a:solidFill>
+          <a:latin typeface="+mn-lt"/>
+          <a:ea typeface="+mn-ea"/>
+          <a:cs typeface="+mn-cs"/>
+        </a:defRPr>
+      </a:lvl2pPr>
+      <a:lvl3pPr marL="1143000" indent="-228600" algn="l" defTabSz="457200" rtl="0" eaLnBrk="1" latinLnBrk="0" hangingPunct="1">
+        <a:spcBef>
+          <a:spcPct val="20000"/>
+        </a:spcBef>
+        <a:buFont typeface="Arial"/>
+        <a:buChar char="•"/>
+        <a:defRPr sz="2400" kern="1200">
+          <a:solidFill>
+            <a:schemeClr val="tx1"/>
+          </a:solidFill>
+          <a:latin typeface="+mn-lt"/>
+          <a:ea typeface="+mn-ea"/>
+          <a:cs typeface="+mn-cs"/>
+        </a:defRPr>
+      </a:lvl3pPr>
+      <a:lvl4pPr marL="1600200" indent="-228600" algn="l" defTabSz="457200" rtl="0" eaLnBrk="1" latinLnBrk="0" hangingPunct="1">
+        <a:spcBef>
+          <a:spcPct val="20000"/>
+        </a:spcBef>
+        <a:buFont typeface="Arial"/>
+        <a:buChar char="–"/>
+        <a:defRPr sz="2000" kern="1200">
+          <a:solidFill>
+            <a:schemeClr val="tx1"/>
+          </a:solidFill>
+          <a:latin typeface="+mn-lt"/>
+          <a:ea typeface="+mn-ea"/>
+          <a:cs typeface="+mn-cs"/>
+        </a:defRPr>
+      </a:lvl4pPr>
+      <a:lvl5pPr marL="2057400" indent="-228600" algn="l" defTabSz="457200" rtl="0" eaLnBrk="1" latinLnBrk="0" hangingPunct="1">
+        <a:spcBef>
+          <a:spcPct val="20000"/>
+        </a:spcBef>
+        <a:buFont typeface="Arial"/>
+        <a:buChar char="»"/>
+        <a:defRPr sz="2000" kern="1200">
+          <a:solidFill>
+            <a:schemeClr val="tx1"/>
+          </a:solidFill>
+          <a:latin typeface="+mn-lt"/>
+          <a:ea typeface="+mn-ea"/>
+          <a:cs typeface="+mn-cs"/>
+        </a:defRPr>
+      </a:lvl5pPr>
+      <a:lvl6pPr marL="2514600" indent="-228600" algn="l" defTabSz="457200" rtl="0" eaLnBrk="1" latinLnBrk="0" hangingPunct="1">
+        <a:spcBef>
+          <a:spcPct val="20000"/>
+        </a:spcBef>
+        <a:buFont typeface="Arial"/>
+        <a:buChar char="•"/>
+        <a:defRPr sz="2000" kern="1200">
+          <a:solidFill>
+            <a:schemeClr val="tx1"/>
+          </a:solidFill>
+          <a:latin typeface="+mn-lt"/>
+          <a:ea typeface="+mn-ea"/>
+          <a:cs typeface="+mn-cs"/>
+        </a:defRPr>
+      </a:lvl6pPr>
+      <a:lvl7pPr marL="2971800" indent="-228600" algn="l" defTabSz="457200" rtl="0" eaLnBrk="1" latinLnBrk="0" hangingPunct="1">
+        <a:spcBef>
+          <a:spcPct val="20000"/>
+        </a:spcBef>
+        <a:buFont typeface="Arial"/>
+        <a:buChar char="•"/>
+        <a:defRPr sz="2000" kern="1200">
+          <a:solidFill>
+            <a:schemeClr val="tx1"/>
+          </a:solidFill>
+          <a:latin typeface="+mn-lt"/>
+          <a:ea typeface="+mn-ea"/>
+          <a:cs typeface="+mn-cs"/>
+        </a:defRPr>
+      </a:lvl7pPr>
+      <a:lvl8pPr marL="3429000" indent="-228600" algn="l" defTabSz="457200" rtl="0" eaLnBrk="1" latinLnBrk="0" hangingPunct="1">
+        <a:spcBef>
+          <a:spcPct val="20000"/>
+        </a:spcBef>
+        <a:buFont typeface="Arial"/>
+        <a:buChar char="•"/>
+        <a:defRPr sz="2000" kern="1200">
+          <a:solidFill>
+            <a:schemeClr val="tx1"/>
+          </a:solidFill>
+          <a:latin typeface="+mn-lt"/>
+          <a:ea typeface="+mn-ea"/>
+          <a:cs typeface="+mn-cs"/>
+        </a:defRPr>
+      </a:lvl8pPr>
+      <a:lvl9pPr marL="3886200" indent="-228600" algn="l" defTabSz="457200" rtl="0" eaLnBrk="1" latinLnBrk="0" hangingPunct="1">
+        <a:spcBef>
+          <a:spcPct val="20000"/>
+        </a:spcBef>
+        <a:buFont typeface="Arial"/>
+        <a:buChar char="•"/>
+        <a:defRPr sz="2000" kern="1200">
+          <a:solidFill>
+            <a:schemeClr val="tx1"/>
+          </a:solidFill>
+          <a:latin typeface="+mn-lt"/>
+          <a:ea typeface="+mn-ea"/>
+          <a:cs typeface="+mn-cs"/>
+        </a:defRPr>
+      </a:lvl9pPr>
     </p:bodyStyle>
     <p:otherStyle>
-      <a:lvl1pPr>
-        <a:defRPr/>
+      <a:defPPr>
+        <a:defRPr lang="en-US"/>
+      </a:defPPr>
+      <a:lvl1pPr marL="0" algn="l" defTabSz="457200" rtl="0" eaLnBrk="1" latinLnBrk="0" hangingPunct="1">
+        <a:defRPr sz="1800" kern="1200">
+          <a:solidFill>
+            <a:schemeClr val="tx1"/>
+          </a:solidFill>
+          <a:latin typeface="+mn-lt"/>
+          <a:ea typeface="+mn-ea"/>
+          <a:cs typeface="+mn-cs"/>
+        </a:defRPr>
       </a:lvl1pPr>
+      <a:lvl2pPr marL="457200" algn="l" defTabSz="457200" rtl="0" eaLnBrk="1" latinLnBrk="0" hangingPunct="1">
+        <a:defRPr sz="1800" kern="1200">
+          <a:solidFill>
+            <a:schemeClr val="tx1"/>
+          </a:solidFill>
+          <a:latin typeface="+mn-lt"/>
+          <a:ea typeface="+mn-ea"/>
+          <a:cs typeface="+mn-cs"/>
+        </a:defRPr>
+      </a:lvl2pPr>
+      <a:lvl3pPr marL="914400" algn="l" defTabSz="457200" rtl="0" eaLnBrk="1" latinLnBrk="0" hangingPunct="1">
+        <a:defRPr sz="1800" kern="1200">
+          <a:solidFill>
+            <a:schemeClr val="tx1"/>
+          </a:solidFill>
+          <a:latin typeface="+mn-lt"/>
+          <a:ea typeface="+mn-ea"/>
+          <a:cs typeface="+mn-cs"/>
+        </a:defRPr>
+      </a:lvl3pPr>
+      <a:lvl4pPr marL="1371600" algn="l" defTabSz="457200" rtl="0" eaLnBrk="1" latinLnBrk="0" hangingPunct="1">
+        <a:defRPr sz="1800" kern="1200">
+          <a:solidFill>
+            <a:schemeClr val="tx1"/>
+          </a:solidFill>
+          <a:latin typeface="+mn-lt"/>
+          <a:ea typeface="+mn-ea"/>
+          <a:cs typeface="+mn-cs"/>
+        </a:defRPr>
+      </a:lvl4pPr>
+      <a:lvl5pPr marL="1828800" algn="l" defTabSz="457200" rtl="0" eaLnBrk="1" latinLnBrk="0" hangingPunct="1">
+        <a:defRPr sz="1800" kern="1200">
+          <a:solidFill>
+            <a:schemeClr val="tx1"/>
+          </a:solidFill>
+          <a:latin typeface="+mn-lt"/>
+          <a:ea typeface="+mn-ea"/>
+          <a:cs typeface="+mn-cs"/>
+        </a:defRPr>
+      </a:lvl5pPr>
+      <a:lvl6pPr marL="2286000" algn="l" defTabSz="457200" rtl="0" eaLnBrk="1" latinLnBrk="0" hangingPunct="1">
+        <a:defRPr sz="1800" kern="1200">
+          <a:solidFill>
+            <a:schemeClr val="tx1"/>
+          </a:solidFill>
+          <a:latin typeface="+mn-lt"/>
+          <a:ea typeface="+mn-ea"/>
+          <a:cs typeface="+mn-cs"/>
+        </a:defRPr>
+      </a:lvl6pPr>
+      <a:lvl7pPr marL="2743200" algn="l" defTabSz="457200" rtl="0" eaLnBrk="1" latinLnBrk="0" hangingPunct="1">
+        <a:defRPr sz="1800" kern="1200">
+          <a:solidFill>
+            <a:schemeClr val="tx1"/>
+          </a:solidFill>
+          <a:latin typeface="+mn-lt"/>
+          <a:ea typeface="+mn-ea"/>
+          <a:cs typeface="+mn-cs"/>
+        </a:defRPr>
+      </a:lvl7pPr>
+      <a:lvl8pPr marL="3200400" algn="l" defTabSz="457200" rtl="0" eaLnBrk="1" latinLnBrk="0" hangingPunct="1">
+        <a:defRPr sz="1800" kern="1200">
+          <a:solidFill>
+            <a:schemeClr val="tx1"/>
+          </a:solidFill>
+          <a:latin typeface="+mn-lt"/>
+          <a:ea typeface="+mn-ea"/>
+          <a:cs typeface="+mn-cs"/>
+        </a:defRPr>
+      </a:lvl8pPr>
+      <a:lvl9pPr marL="3657600" algn="l" defTabSz="457200" rtl="0" eaLnBrk="1" latinLnBrk="0" hangingPunct="1">
+        <a:defRPr sz="1800" kern="1200">
+          <a:solidFill>
+            <a:schemeClr val="tx1"/>
+          </a:solidFill>
+          <a:latin typeface="+mn-lt"/>
+          <a:ea typeface="+mn-ea"/>
+          <a:cs typeface="+mn-cs"/>
+        </a:defRPr>
+      </a:lvl9pPr>
     </p:otherStyle>
   </p:txStyles>
 </p:sldMaster>
 </file>
 
 <file path=ppt/slides/slide1.xml><?xml version="1.0" encoding="utf-8"?>
-<p:sld xmlns:a="http://schemas.openxmlformats.org/drawingml/2006/main" xmlns:p="http://schemas.openxmlformats.org/presentationml/2006/main">
+<p:sld xmlns:a="http://schemas.openxmlformats.org/drawingml/2006/main" xmlns:p="http://schemas.openxmlformats.org/presentationml/2006/main" xmlns:r="http://schemas.openxmlformats.org/officeDocument/2006/relationships">
   <p:cSld>
     <p:spTree>
       <p:nvGrpSpPr>
@@ -814,14 +3092,7 @@
         <p:cNvGrpSpPr/>
         <p:nvPr/>
       </p:nvGrpSpPr>
-      <p:grpSpPr>
-        <a:xfrm>
-          <a:off x="0" y="0"/>
-          <a:ext cx="0" cy="0"/>
-          <a:chOff x="0" y="0"/>
-          <a:chExt cx="0" cy="0"/>
-        </a:xfrm>
-      </p:grpSpPr>
+      <p:grpSpPr/>
       <p:sp>
         <p:nvSpPr>
           <p:cNvPr id="2" name="Title 1"/>
@@ -838,10 +3109,8 @@
           <a:lstStyle/>
           <a:p>
             <a:r>
-              <a:rPr lang="en-US" dirty="0"/>
-              <a:t>Example Presentation</a:t>
-            </a:r>
-            <a:endParaRPr lang="en-US"/>
+              <a:t>From-Scratch PowerPoint Generator</a:t>
+            </a:r>
           </a:p>
         </p:txBody>
       </p:sp>
@@ -861,10 +3130,8 @@
           <a:lstStyle/>
           <a:p>
             <a:r>
-              <a:rPr lang="en-US" dirty="0"/>
-              <a:t>Created with Python</a:t>
-            </a:r>
-            <a:endParaRPr lang="en-US"/>
+              <a:t>Built using XML and Python standard library</a:t>
+            </a:r>
           </a:p>
         </p:txBody>
       </p:sp>
@@ -877,7 +3144,7 @@
 </file>
 
 <file path=ppt/slides/slide2.xml><?xml version="1.0" encoding="utf-8"?>
-<p:sld xmlns:a="http://schemas.openxmlformats.org/drawingml/2006/main" xmlns:p="http://schemas.openxmlformats.org/presentationml/2006/main">
+<p:sld xmlns:a="http://schemas.openxmlformats.org/drawingml/2006/main" xmlns:p="http://schemas.openxmlformats.org/presentationml/2006/main" xmlns:r="http://schemas.openxmlformats.org/officeDocument/2006/relationships">
   <p:cSld>
     <p:spTree>
       <p:nvGrpSpPr>
@@ -885,14 +3152,7 @@
         <p:cNvGrpSpPr/>
         <p:nvPr/>
       </p:nvGrpSpPr>
-      <p:grpSpPr>
-        <a:xfrm>
-          <a:off x="0" y="0"/>
-          <a:ext cx="0" cy="0"/>
-          <a:chOff x="0" y="0"/>
-          <a:chExt cx="0" cy="0"/>
-        </a:xfrm>
-      </p:grpSpPr>
+      <p:grpSpPr/>
       <p:sp>
         <p:nvSpPr>
           <p:cNvPr id="2" name="Title 1"/>
@@ -909,10 +3169,8 @@
           <a:lstStyle/>
           <a:p>
             <a:r>
-              <a:rPr lang="en-US" dirty="0"/>
-              <a:t>Key Points</a:t>
-            </a:r>
-            <a:endParaRPr lang="en-US"/>
+              <a:t>About This Generator</a:t>
+            </a:r>
           </a:p>
         </p:txBody>
       </p:sp>
@@ -923,33 +3181,42 @@
             <a:spLocks noGrp="1"/>
           </p:cNvSpPr>
           <p:nvPr>
-            <p:ph type="body" idx="1"/>
-          </p:nvPr>
-        </p:nvSpPr>
-        <p:spPr/>
-        <p:txBody>
-          <a:bodyPr/>
-          <a:lstStyle/>
-          <a:p>
-            <a:r>
-              <a:rPr lang="en-US" dirty="0"/>
-              <a:t>Point 1</a:t>
-            </a:r>
-            <a:endParaRPr lang="en-US"/>
-          </a:p>
-          <a:p>
-            <a:r>
-              <a:rPr lang="en-US" dirty="0"/>
-              <a:t>Point 2</a:t>
-            </a:r>
-            <a:endParaRPr lang="en-US"/>
-          </a:p>
-          <a:p>
-            <a:r>
-              <a:rPr lang="en-US" dirty="0"/>
-              <a:t>Point 3</a:t>
-            </a:r>
-            <a:endParaRPr lang="en-US"/>
+            <p:ph idx="1"/>
+          </p:nvPr>
+        </p:nvSpPr>
+        <p:spPr/>
+        <p:txBody>
+          <a:bodyPr/>
+          <a:lstStyle/>
+          <a:p>
+            <a:pPr/>
+            <a:r>
+              <a:t>Creates .pptx files by building XML structure directly</a:t>
+            </a:r>
+          </a:p>
+          <a:p>
+            <a:pPr/>
+            <a:r>
+              <a:t>No external libraries like python-pptx needed</a:t>
+            </a:r>
+          </a:p>
+          <a:p>
+            <a:pPr/>
+            <a:r>
+              <a:t>Uses Python's zipfile and xml.etree modules only</a:t>
+            </a:r>
+          </a:p>
+          <a:p>
+            <a:pPr/>
+            <a:r>
+              <a:t>Full control over PowerPoint Open XML format</a:t>
+            </a:r>
+          </a:p>
+          <a:p>
+            <a:pPr/>
+            <a:r>
+              <a:t>Educational and practical</a:t>
+            </a:r>
           </a:p>
         </p:txBody>
       </p:sp>
@@ -962,7 +3229,7 @@
 </file>
 
 <file path=ppt/slides/slide3.xml><?xml version="1.0" encoding="utf-8"?>
-<p:sld xmlns:a="http://schemas.openxmlformats.org/drawingml/2006/main" xmlns:p="http://schemas.openxmlformats.org/presentationml/2006/main">
+<p:sld xmlns:a="http://schemas.openxmlformats.org/drawingml/2006/main" xmlns:p="http://schemas.openxmlformats.org/presentationml/2006/main" xmlns:r="http://schemas.openxmlformats.org/officeDocument/2006/relationships">
   <p:cSld>
     <p:spTree>
       <p:nvGrpSpPr>
@@ -970,14 +3237,7 @@
         <p:cNvGrpSpPr/>
         <p:nvPr/>
       </p:nvGrpSpPr>
-      <p:grpSpPr>
-        <a:xfrm>
-          <a:off x="0" y="0"/>
-          <a:ext cx="0" cy="0"/>
-          <a:chOff x="0" y="0"/>
-          <a:chExt cx="0" cy="0"/>
-        </a:xfrm>
-      </p:grpSpPr>
+      <p:grpSpPr/>
       <p:sp>
         <p:nvSpPr>
           <p:cNvPr id="2" name="Title 1"/>
@@ -994,10 +3254,8 @@
           <a:lstStyle/>
           <a:p>
             <a:r>
-              <a:rPr lang="en-US" dirty="0"/>
-              <a:t>Comparison</a:t>
-            </a:r>
-            <a:endParaRPr lang="en-US"/>
+              <a:t>How It Works</a:t>
+            </a:r>
           </a:p>
         </p:txBody>
       </p:sp>
@@ -1008,56 +3266,309 @@
             <a:spLocks noGrp="1"/>
           </p:cNvSpPr>
           <p:nvPr>
-            <p:ph type="body" idx="1"/>
-          </p:nvPr>
-        </p:nvSpPr>
-        <p:spPr/>
-        <p:txBody>
-          <a:bodyPr/>
-          <a:lstStyle/>
-          <a:p>
-            <a:r>
-              <a:rPr lang="en-US" dirty="0"/>
-              <a:t>Left A</a:t>
-            </a:r>
-            <a:endParaRPr lang="en-US"/>
-          </a:p>
-          <a:p>
-            <a:r>
-              <a:rPr lang="en-US" dirty="0"/>
-              <a:t>Left B</a:t>
-            </a:r>
-            <a:endParaRPr lang="en-US"/>
-          </a:p>
-        </p:txBody>
-      </p:sp>
-      <p:sp>
-        <p:nvSpPr>
-          <p:cNvPr id="4" name="Content Placeholder 3"/>
-          <p:cNvSpPr>
-            <a:spLocks noGrp="1"/>
-          </p:cNvSpPr>
-          <p:nvPr>
-            <p:ph type="body" idx="2"/>
-          </p:nvPr>
-        </p:nvSpPr>
-        <p:spPr/>
-        <p:txBody>
-          <a:bodyPr/>
-          <a:lstStyle/>
-          <a:p>
-            <a:r>
-              <a:rPr lang="en-US" dirty="0"/>
-              <a:t>Right A</a:t>
-            </a:r>
-            <a:endParaRPr lang="en-US"/>
-          </a:p>
-          <a:p>
-            <a:r>
-              <a:rPr lang="en-US" dirty="0"/>
-              <a:t>Right B</a:t>
-            </a:r>
-            <a:endParaRPr lang="en-US"/>
+            <p:ph idx="1"/>
+          </p:nvPr>
+        </p:nvSpPr>
+        <p:spPr/>
+        <p:txBody>
+          <a:bodyPr/>
+          <a:lstStyle/>
+          <a:p>
+            <a:pPr/>
+            <a:r>
+              <a:t>PowerPoint files are ZIP archives containing XML</a:t>
+            </a:r>
+          </a:p>
+          <a:p>
+            <a:pPr/>
+            <a:r>
+              <a:t>Generates [Content_Types].xml for file definitions</a:t>
+            </a:r>
+          </a:p>
+          <a:p>
+            <a:pPr/>
+            <a:r>
+              <a:t>Creates presentation.xml for structure</a:t>
+            </a:r>
+          </a:p>
+          <a:p>
+            <a:pPr/>
+            <a:r>
+              <a:t>Builds individual slide XML files</a:t>
+            </a:r>
+          </a:p>
+          <a:p>
+            <a:pPr/>
+            <a:r>
+              <a:t>Includes themes, layouts, and relationships</a:t>
+            </a:r>
+          </a:p>
+        </p:txBody>
+      </p:sp>
+    </p:spTree>
+  </p:cSld>
+  <p:clrMapOvr>
+    <a:masterClrMapping/>
+  </p:clrMapOvr>
+</p:sld>
+</file>
+
+<file path=ppt/slides/slide4.xml><?xml version="1.0" encoding="utf-8"?>
+<p:sld xmlns:a="http://schemas.openxmlformats.org/drawingml/2006/main" xmlns:p="http://schemas.openxmlformats.org/presentationml/2006/main" xmlns:r="http://schemas.openxmlformats.org/officeDocument/2006/relationships">
+  <p:cSld>
+    <p:spTree>
+      <p:nvGrpSpPr>
+        <p:cNvPr id="1" name=""/>
+        <p:cNvGrpSpPr/>
+        <p:nvPr/>
+      </p:nvGrpSpPr>
+      <p:grpSpPr/>
+      <p:sp>
+        <p:nvSpPr>
+          <p:cNvPr id="2" name="Title 1"/>
+          <p:cNvSpPr>
+            <a:spLocks noGrp="1"/>
+          </p:cNvSpPr>
+          <p:nvPr>
+            <p:ph type="title"/>
+          </p:nvPr>
+        </p:nvSpPr>
+        <p:spPr/>
+        <p:txBody>
+          <a:bodyPr/>
+          <a:lstStyle/>
+          <a:p>
+            <a:r>
+              <a:t>PowerPoint XML Structure</a:t>
+            </a:r>
+          </a:p>
+        </p:txBody>
+      </p:sp>
+      <p:sp>
+        <p:nvSpPr>
+          <p:cNvPr id="3" name="Content Placeholder 2"/>
+          <p:cNvSpPr>
+            <a:spLocks noGrp="1"/>
+          </p:cNvSpPr>
+          <p:nvPr>
+            <p:ph idx="1"/>
+          </p:nvPr>
+        </p:nvSpPr>
+        <p:spPr/>
+        <p:txBody>
+          <a:bodyPr/>
+          <a:lstStyle/>
+          <a:p>
+            <a:pPr/>
+            <a:r>
+              <a:t>[Content_Types].xml: MIME type definitions</a:t>
+            </a:r>
+          </a:p>
+          <a:p>
+            <a:pPr/>
+            <a:r>
+              <a:t>ppt/presentation.xml: Main presentation</a:t>
+            </a:r>
+          </a:p>
+          <a:p>
+            <a:pPr/>
+            <a:r>
+              <a:t>ppt/slides/slide*.xml: Individual slides</a:t>
+            </a:r>
+          </a:p>
+          <a:p>
+            <a:pPr/>
+            <a:r>
+              <a:t>ppt/slideLayouts/: Layout templates</a:t>
+            </a:r>
+          </a:p>
+          <a:p>
+            <a:pPr/>
+            <a:r>
+              <a:t>ppt/slideMasters/: Master templates</a:t>
+            </a:r>
+          </a:p>
+          <a:p>
+            <a:pPr/>
+            <a:r>
+              <a:t>ppt/theme/: Theme definitions</a:t>
+            </a:r>
+          </a:p>
+        </p:txBody>
+      </p:sp>
+    </p:spTree>
+  </p:cSld>
+  <p:clrMapOvr>
+    <a:masterClrMapping/>
+  </p:clrMapOvr>
+</p:sld>
+</file>
+
+<file path=ppt/slides/slide5.xml><?xml version="1.0" encoding="utf-8"?>
+<p:sld xmlns:a="http://schemas.openxmlformats.org/drawingml/2006/main" xmlns:p="http://schemas.openxmlformats.org/presentationml/2006/main" xmlns:r="http://schemas.openxmlformats.org/officeDocument/2006/relationships">
+  <p:cSld>
+    <p:spTree>
+      <p:nvGrpSpPr>
+        <p:cNvPr id="1" name=""/>
+        <p:cNvGrpSpPr/>
+        <p:nvPr/>
+      </p:nvGrpSpPr>
+      <p:grpSpPr/>
+      <p:sp>
+        <p:nvSpPr>
+          <p:cNvPr id="2" name="Title 1"/>
+          <p:cNvSpPr>
+            <a:spLocks noGrp="1"/>
+          </p:cNvSpPr>
+          <p:nvPr>
+            <p:ph type="title"/>
+          </p:nvPr>
+        </p:nvSpPr>
+        <p:spPr/>
+        <p:txBody>
+          <a:bodyPr/>
+          <a:lstStyle/>
+          <a:p>
+            <a:r>
+              <a:t>Current Features</a:t>
+            </a:r>
+          </a:p>
+        </p:txBody>
+      </p:sp>
+      <p:sp>
+        <p:nvSpPr>
+          <p:cNvPr id="3" name="Content Placeholder 2"/>
+          <p:cNvSpPr>
+            <a:spLocks noGrp="1"/>
+          </p:cNvSpPr>
+          <p:nvPr>
+            <p:ph idx="1"/>
+          </p:nvPr>
+        </p:nvSpPr>
+        <p:spPr/>
+        <p:txBody>
+          <a:bodyPr/>
+          <a:lstStyle/>
+          <a:p>
+            <a:pPr/>
+            <a:r>
+              <a:t>Title slides with subtitles</a:t>
+            </a:r>
+          </a:p>
+          <a:p>
+            <a:pPr/>
+            <a:r>
+              <a:t>Content slides with bullet points</a:t>
+            </a:r>
+          </a:p>
+          <a:p>
+            <a:pPr/>
+            <a:r>
+              <a:t>Custom positioning and sizing</a:t>
+            </a:r>
+          </a:p>
+          <a:p>
+            <a:pPr/>
+            <a:r>
+              <a:t>Font size and color control</a:t>
+            </a:r>
+          </a:p>
+          <a:p>
+            <a:pPr/>
+            <a:r>
+              <a:t>Text alignment options</a:t>
+            </a:r>
+          </a:p>
+          <a:p>
+            <a:pPr/>
+            <a:r>
+              <a:t>Bold text support</a:t>
+            </a:r>
+          </a:p>
+        </p:txBody>
+      </p:sp>
+    </p:spTree>
+  </p:cSld>
+  <p:clrMapOvr>
+    <a:masterClrMapping/>
+  </p:clrMapOvr>
+</p:sld>
+</file>
+
+<file path=ppt/slides/slide6.xml><?xml version="1.0" encoding="utf-8"?>
+<p:sld xmlns:a="http://schemas.openxmlformats.org/drawingml/2006/main" xmlns:p="http://schemas.openxmlformats.org/presentationml/2006/main" xmlns:r="http://schemas.openxmlformats.org/officeDocument/2006/relationships">
+  <p:cSld>
+    <p:spTree>
+      <p:nvGrpSpPr>
+        <p:cNvPr id="1" name=""/>
+        <p:cNvGrpSpPr/>
+        <p:nvPr/>
+      </p:nvGrpSpPr>
+      <p:grpSpPr/>
+      <p:sp>
+        <p:nvSpPr>
+          <p:cNvPr id="2" name="Title 1"/>
+          <p:cNvSpPr>
+            <a:spLocks noGrp="1"/>
+          </p:cNvSpPr>
+          <p:nvPr>
+            <p:ph type="title"/>
+          </p:nvPr>
+        </p:nvSpPr>
+        <p:spPr/>
+        <p:txBody>
+          <a:bodyPr/>
+          <a:lstStyle/>
+          <a:p>
+            <a:r>
+              <a:t>Usage Example</a:t>
+            </a:r>
+          </a:p>
+        </p:txBody>
+      </p:sp>
+      <p:sp>
+        <p:nvSpPr>
+          <p:cNvPr id="3" name="Content Placeholder 2"/>
+          <p:cNvSpPr>
+            <a:spLocks noGrp="1"/>
+          </p:cNvSpPr>
+          <p:nvPr>
+            <p:ph idx="1"/>
+          </p:nvPr>
+        </p:nvSpPr>
+        <p:spPr/>
+        <p:txBody>
+          <a:bodyPr/>
+          <a:lstStyle/>
+          <a:p>
+            <a:pPr/>
+            <a:r>
+              <a:t>from pptx_generator_complete import CompletePPTXGenerator as PPTXGenerator</a:t>
+            </a:r>
+          </a:p>
+          <a:p>
+            <a:pPr/>
+            <a:r>
+              <a:t>ppt = PPTXGenerator()</a:t>
+            </a:r>
+          </a:p>
+          <a:p>
+            <a:pPr/>
+            <a:r>
+              <a:t>ppt.add_title_slide('Title', 'Subtitle')</a:t>
+            </a:r>
+          </a:p>
+          <a:p>
+            <a:pPr/>
+            <a:r>
+              <a:t>ppt.add_content_slide('Topic', ['Point 1', 'Point 2'])</a:t>
+            </a:r>
+          </a:p>
+          <a:p>
+            <a:pPr/>
+            <a:r>
+              <a:t>ppt.save('output.pptx')</a:t>
+            </a:r>
           </a:p>
         </p:txBody>
       </p:sp>
@@ -1074,52 +3585,112 @@
   <a:themeElements>
     <a:clrScheme name="Office">
       <a:dk1>
-        <a:srgbClr val="000000"/>
+        <a:sysClr val="windowText" lastClr="000000"/>
       </a:dk1>
       <a:lt1>
-        <a:srgbClr val="FFFFFF"/>
+        <a:sysClr val="window" lastClr="FFFFFF"/>
       </a:lt1>
       <a:dk2>
-        <a:srgbClr val="44546A"/>
+        <a:srgbClr val="1F497D"/>
       </a:dk2>
       <a:lt2>
-        <a:srgbClr val="E7E6E6"/>
+        <a:srgbClr val="EEECE1"/>
       </a:lt2>
       <a:accent1>
-        <a:srgbClr val="5B9BD5"/>
+        <a:srgbClr val="4F81BD"/>
       </a:accent1>
       <a:accent2>
-        <a:srgbClr val="ED7D31"/>
+        <a:srgbClr val="C0504D"/>
       </a:accent2>
       <a:accent3>
-        <a:srgbClr val="A5A5A5"/>
+        <a:srgbClr val="9BBB59"/>
       </a:accent3>
       <a:accent4>
-        <a:srgbClr val="FFC000"/>
+        <a:srgbClr val="8064A2"/>
       </a:accent4>
       <a:accent5>
-        <a:srgbClr val="4472C4"/>
+        <a:srgbClr val="4BACC6"/>
       </a:accent5>
       <a:accent6>
-        <a:srgbClr val="70AD47"/>
+        <a:srgbClr val="F79646"/>
       </a:accent6>
       <a:hlink>
-        <a:srgbClr val="0563C1"/>
+        <a:srgbClr val="0000FF"/>
       </a:hlink>
       <a:folHlink>
-        <a:srgbClr val="954F72"/>
+        <a:srgbClr val="800080"/>
       </a:folHlink>
     </a:clrScheme>
     <a:fontScheme name="Office">
       <a:majorFont>
-        <a:latin typeface="Calibri Light" panose="020F0302020204030204"/>
+        <a:latin typeface="Calibri"/>
         <a:ea typeface=""/>
         <a:cs typeface=""/>
+        <a:font script="Jpan" typeface="ＭＳ Ｐゴシック"/>
+        <a:font script="Hang" typeface="맑은 고딕"/>
+        <a:font script="Hans" typeface="宋体"/>
+        <a:font script="Hant" typeface="新細明體"/>
+        <a:font script="Arab" typeface="Times New Roman"/>
+        <a:font script="Hebr" typeface="Times New Roman"/>
+        <a:font script="Thai" typeface="Angsana New"/>
+        <a:font script="Ethi" typeface="Nyala"/>
+        <a:font script="Beng" typeface="Vrinda"/>
+        <a:font script="Gujr" typeface="Shruti"/>
+        <a:font script="Khmr" typeface="MoolBoran"/>
+        <a:font script="Knda" typeface="Tunga"/>
+        <a:font script="Guru" typeface="Raavi"/>
+        <a:font script="Cans" typeface="Euphemia"/>
+        <a:font script="Cher" typeface="Plantagenet Cherokee"/>
+        <a:font script="Yiii" typeface="Microsoft Yi Baiti"/>
+        <a:font script="Tibt" typeface="Microsoft Himalaya"/>
+        <a:font script="Thaa" typeface="MV Boli"/>
+        <a:font script="Deva" typeface="Mangal"/>
+        <a:font script="Telu" typeface="Gautami"/>
+        <a:font script="Taml" typeface="Latha"/>
+        <a:font script="Syrc" typeface="Estrangelo Edessa"/>
+        <a:font script="Orya" typeface="Kalinga"/>
+        <a:font script="Mlym" typeface="Kartika"/>
+        <a:font script="Laoo" typeface="DokChampa"/>
+        <a:font script="Sinh" typeface="Iskoola Pota"/>
+        <a:font script="Mong" typeface="Mongolian Baiti"/>
+        <a:font script="Viet" typeface="Times New Roman"/>
+        <a:font script="Uigh" typeface="Microsoft Uighur"/>
+        <a:font script="Geor" typeface="Sylfaen"/>
       </a:majorFont>
       <a:minorFont>
-        <a:latin typeface="Calibri" panose="020F0502020204030204"/>
+        <a:latin typeface="Calibri"/>
         <a:ea typeface=""/>
         <a:cs typeface=""/>
+        <a:font script="Jpan" typeface="ＭＳ Ｐゴシック"/>
+        <a:font script="Hang" typeface="맑은 고딕"/>
+        <a:font script="Hans" typeface="宋体"/>
+        <a:font script="Hant" typeface="新細明體"/>
+        <a:font script="Arab" typeface="Arial"/>
+        <a:font script="Hebr" typeface="Arial"/>
+        <a:font script="Thai" typeface="Cordia New"/>
+        <a:font script="Ethi" typeface="Nyala"/>
+        <a:font script="Beng" typeface="Vrinda"/>
+        <a:font script="Gujr" typeface="Shruti"/>
+        <a:font script="Khmr" typeface="DaunPenh"/>
+        <a:font script="Knda" typeface="Tunga"/>
+        <a:font script="Guru" typeface="Raavi"/>
+        <a:font script="Cans" typeface="Euphemia"/>
+        <a:font script="Cher" typeface="Plantagenet Cherokee"/>
+        <a:font script="Yiii" typeface="Microsoft Yi Baiti"/>
+        <a:font script="Tibt" typeface="Microsoft Himalaya"/>
+        <a:font script="Thaa" typeface="MV Boli"/>
+        <a:font script="Deva" typeface="Mangal"/>
+        <a:font script="Telu" typeface="Gautami"/>
+        <a:font script="Taml" typeface="Latha"/>
+        <a:font script="Syrc" typeface="Estrangelo Edessa"/>
+        <a:font script="Orya" typeface="Kalinga"/>
+        <a:font script="Mlym" typeface="Kartika"/>
+        <a:font script="Laoo" typeface="DokChampa"/>
+        <a:font script="Sinh" typeface="Iskoola Pota"/>
+        <a:font script="Mong" typeface="Mongolian Baiti"/>
+        <a:font script="Viet" typeface="Arial"/>
+        <a:font script="Uigh" typeface="Microsoft Uighur"/>
+        <a:font script="Geor" typeface="Sylfaen"/>
       </a:minorFont>
     </a:fontScheme>
     <a:fmtScheme name="Office">
@@ -1127,25 +3698,204 @@
         <a:solidFill>
           <a:schemeClr val="phClr"/>
         </a:solidFill>
+        <a:gradFill rotWithShape="1">
+          <a:gsLst>
+            <a:gs pos="0">
+              <a:schemeClr val="phClr">
+                <a:tint val="50000"/>
+                <a:satMod val="300000"/>
+              </a:schemeClr>
+            </a:gs>
+            <a:gs pos="35000">
+              <a:schemeClr val="phClr">
+                <a:tint val="37000"/>
+                <a:satMod val="300000"/>
+              </a:schemeClr>
+            </a:gs>
+            <a:gs pos="100000">
+              <a:schemeClr val="phClr">
+                <a:tint val="15000"/>
+                <a:satMod val="350000"/>
+              </a:schemeClr>
+            </a:gs>
+          </a:gsLst>
+          <a:lin ang="16200000" scaled="1"/>
+        </a:gradFill>
+        <a:gradFill rotWithShape="1">
+          <a:gsLst>
+            <a:gs pos="0">
+              <a:schemeClr val="phClr">
+                <a:tint val="100000"/>
+                <a:shade val="100000"/>
+                <a:satMod val="130000"/>
+              </a:schemeClr>
+            </a:gs>
+            <a:gs pos="100000">
+              <a:schemeClr val="phClr">
+                <a:tint val="50000"/>
+                <a:shade val="100000"/>
+                <a:satMod val="350000"/>
+              </a:schemeClr>
+            </a:gs>
+          </a:gsLst>
+          <a:lin ang="16200000" scaled="0"/>
+        </a:gradFill>
       </a:fillStyleLst>
-      <a:lineStyleLst>
+      <a:lnStyleLst>
         <a:ln w="9525" cap="flat" cmpd="sng" algn="ctr">
+          <a:solidFill>
+            <a:schemeClr val="phClr">
+              <a:shade val="95000"/>
+              <a:satMod val="105000"/>
+            </a:schemeClr>
+          </a:solidFill>
+          <a:prstDash val="solid"/>
+        </a:ln>
+        <a:ln w="25400" cap="flat" cmpd="sng" algn="ctr">
           <a:solidFill>
             <a:schemeClr val="phClr"/>
           </a:solidFill>
+          <a:prstDash val="solid"/>
         </a:ln>
-      </a:lineStyleLst>
+        <a:ln w="38100" cap="flat" cmpd="sng" algn="ctr">
+          <a:solidFill>
+            <a:schemeClr val="phClr"/>
+          </a:solidFill>
+          <a:prstDash val="solid"/>
+        </a:ln>
+      </a:lnStyleLst>
       <a:effectStyleLst>
         <a:effectStyle>
-          <a:effectLst/>
+          <a:effectLst>
+            <a:outerShdw blurRad="40000" dist="20000" dir="5400000" rotWithShape="0">
+              <a:srgbClr val="000000">
+                <a:alpha val="38000"/>
+              </a:srgbClr>
+            </a:outerShdw>
+          </a:effectLst>
+        </a:effectStyle>
+        <a:effectStyle>
+          <a:effectLst>
+            <a:outerShdw blurRad="40000" dist="23000" dir="5400000" rotWithShape="0">
+              <a:srgbClr val="000000">
+                <a:alpha val="35000"/>
+              </a:srgbClr>
+            </a:outerShdw>
+          </a:effectLst>
+        </a:effectStyle>
+        <a:effectStyle>
+          <a:effectLst>
+            <a:outerShdw blurRad="40000" dist="23000" dir="5400000" rotWithShape="0">
+              <a:srgbClr val="000000">
+                <a:alpha val="35000"/>
+              </a:srgbClr>
+            </a:outerShdw>
+          </a:effectLst>
+          <a:scene3d>
+            <a:camera prst="orthographicFront">
+              <a:rot lat="0" lon="0" rev="0"/>
+            </a:camera>
+            <a:lightRig rig="threePt" dir="t">
+              <a:rot lat="0" lon="0" rev="1200000"/>
+            </a:lightRig>
+          </a:scene3d>
+          <a:sp3d>
+            <a:bevelT w="63500" h="25400"/>
+          </a:sp3d>
         </a:effectStyle>
       </a:effectStyleLst>
       <a:bgFillStyleLst>
         <a:solidFill>
           <a:schemeClr val="phClr"/>
         </a:solidFill>
+        <a:gradFill rotWithShape="1">
+          <a:gsLst>
+            <a:gs pos="0">
+              <a:schemeClr val="phClr">
+                <a:tint val="40000"/>
+                <a:satMod val="350000"/>
+              </a:schemeClr>
+            </a:gs>
+            <a:gs pos="40000">
+              <a:schemeClr val="phClr">
+                <a:tint val="45000"/>
+                <a:shade val="99000"/>
+                <a:satMod val="350000"/>
+              </a:schemeClr>
+            </a:gs>
+            <a:gs pos="100000">
+              <a:schemeClr val="phClr">
+                <a:shade val="20000"/>
+                <a:satMod val="255000"/>
+              </a:schemeClr>
+            </a:gs>
+          </a:gsLst>
+          <a:path path="circle">
+            <a:fillToRect l="50000" t="-80000" r="50000" b="180000"/>
+          </a:path>
+        </a:gradFill>
+        <a:gradFill rotWithShape="1">
+          <a:gsLst>
+            <a:gs pos="0">
+              <a:schemeClr val="phClr">
+                <a:tint val="80000"/>
+                <a:satMod val="300000"/>
+              </a:schemeClr>
+            </a:gs>
+            <a:gs pos="100000">
+              <a:schemeClr val="phClr">
+                <a:shade val="30000"/>
+                <a:satMod val="200000"/>
+              </a:schemeClr>
+            </a:gs>
+          </a:gsLst>
+          <a:path path="circle">
+            <a:fillToRect l="50000" t="50000" r="50000" b="50000"/>
+          </a:path>
+        </a:gradFill>
       </a:bgFillStyleLst>
     </a:fmtScheme>
   </a:themeElements>
+  <a:objectDefaults>
+    <a:spDef>
+      <a:spPr/>
+      <a:bodyPr/>
+      <a:lstStyle/>
+      <a:style>
+        <a:lnRef idx="1">
+          <a:schemeClr val="accent1"/>
+        </a:lnRef>
+        <a:fillRef idx="3">
+          <a:schemeClr val="accent1"/>
+        </a:fillRef>
+        <a:effectRef idx="2">
+          <a:schemeClr val="accent1"/>
+        </a:effectRef>
+        <a:fontRef idx="minor">
+          <a:schemeClr val="lt1"/>
+        </a:fontRef>
+      </a:style>
+    </a:spDef>
+    <a:lnDef>
+      <a:spPr/>
+      <a:bodyPr/>
+      <a:lstStyle/>
+      <a:style>
+        <a:lnRef idx="2">
+          <a:schemeClr val="accent1"/>
+        </a:lnRef>
+        <a:fillRef idx="0">
+          <a:schemeClr val="accent1"/>
+        </a:fillRef>
+        <a:effectRef idx="1">
+          <a:schemeClr val="accent1"/>
+        </a:effectRef>
+        <a:fontRef idx="minor">
+          <a:schemeClr val="tx1"/>
+        </a:fontRef>
+      </a:style>
+    </a:lnDef>
+  </a:objectDefaults>
+  <a:extraClrSchemeLst/>
 </a:theme>
 </file>